--- a/files/slides/SAS4.pptx
+++ b/files/slides/SAS4.pptx
@@ -5,44 +5,42 @@
     <p:sldMasterId id="2147483760" r:id="rId1"/>
   </p:sldMasterIdLst>
   <p:notesMasterIdLst>
-    <p:notesMasterId r:id="rId29"/>
+    <p:notesMasterId r:id="rId27"/>
   </p:notesMasterIdLst>
   <p:handoutMasterIdLst>
-    <p:handoutMasterId r:id="rId30"/>
+    <p:handoutMasterId r:id="rId28"/>
   </p:handoutMasterIdLst>
   <p:sldIdLst>
     <p:sldId id="486" r:id="rId2"/>
-    <p:sldId id="300" r:id="rId3"/>
-    <p:sldId id="402" r:id="rId4"/>
-    <p:sldId id="492" r:id="rId5"/>
-    <p:sldId id="502" r:id="rId6"/>
-    <p:sldId id="503" r:id="rId7"/>
-    <p:sldId id="359" r:id="rId8"/>
-    <p:sldId id="356" r:id="rId9"/>
-    <p:sldId id="421" r:id="rId10"/>
-    <p:sldId id="357" r:id="rId11"/>
-    <p:sldId id="358" r:id="rId12"/>
-    <p:sldId id="347" r:id="rId13"/>
-    <p:sldId id="303" r:id="rId14"/>
-    <p:sldId id="352" r:id="rId15"/>
-    <p:sldId id="351" r:id="rId16"/>
-    <p:sldId id="363" r:id="rId17"/>
-    <p:sldId id="415" r:id="rId18"/>
-    <p:sldId id="422" r:id="rId19"/>
-    <p:sldId id="417" r:id="rId20"/>
-    <p:sldId id="418" r:id="rId21"/>
-    <p:sldId id="488" r:id="rId22"/>
-    <p:sldId id="419" r:id="rId23"/>
-    <p:sldId id="504" r:id="rId24"/>
-    <p:sldId id="408" r:id="rId25"/>
-    <p:sldId id="409" r:id="rId26"/>
-    <p:sldId id="406" r:id="rId27"/>
-    <p:sldId id="404" r:id="rId28"/>
+    <p:sldId id="492" r:id="rId3"/>
+    <p:sldId id="502" r:id="rId4"/>
+    <p:sldId id="503" r:id="rId5"/>
+    <p:sldId id="359" r:id="rId6"/>
+    <p:sldId id="356" r:id="rId7"/>
+    <p:sldId id="421" r:id="rId8"/>
+    <p:sldId id="357" r:id="rId9"/>
+    <p:sldId id="358" r:id="rId10"/>
+    <p:sldId id="347" r:id="rId11"/>
+    <p:sldId id="303" r:id="rId12"/>
+    <p:sldId id="352" r:id="rId13"/>
+    <p:sldId id="351" r:id="rId14"/>
+    <p:sldId id="363" r:id="rId15"/>
+    <p:sldId id="415" r:id="rId16"/>
+    <p:sldId id="422" r:id="rId17"/>
+    <p:sldId id="417" r:id="rId18"/>
+    <p:sldId id="418" r:id="rId19"/>
+    <p:sldId id="488" r:id="rId20"/>
+    <p:sldId id="419" r:id="rId21"/>
+    <p:sldId id="504" r:id="rId22"/>
+    <p:sldId id="408" r:id="rId23"/>
+    <p:sldId id="409" r:id="rId24"/>
+    <p:sldId id="406" r:id="rId25"/>
+    <p:sldId id="404" r:id="rId26"/>
   </p:sldIdLst>
   <p:sldSz cx="9144000" cy="6858000" type="screen4x3"/>
   <p:notesSz cx="7023100" cy="9309100"/>
   <p:custDataLst>
-    <p:tags r:id="rId31"/>
+    <p:tags r:id="rId29"/>
   </p:custDataLst>
   <p:defaultTextStyle>
     <a:defPPr>
@@ -442,12 +440,12 @@
   <pc:docChgLst>
     <pc:chgData name="Kaitlyn Fitzgerald" userId="5f80a7dc-562f-4413-9d6e-37134f387a9f" providerId="ADAL" clId="{FC2319E2-36D7-52E6-A55A-33E60E1F0DB6}"/>
     <pc:docChg chg="undo custSel addSld delSld modSld delMainMaster">
-      <pc:chgData name="Kaitlyn Fitzgerald" userId="5f80a7dc-562f-4413-9d6e-37134f387a9f" providerId="ADAL" clId="{FC2319E2-36D7-52E6-A55A-33E60E1F0DB6}" dt="2025-09-17T17:43:32.067" v="1383" actId="1076"/>
+      <pc:chgData name="Kaitlyn Fitzgerald" userId="5f80a7dc-562f-4413-9d6e-37134f387a9f" providerId="ADAL" clId="{FC2319E2-36D7-52E6-A55A-33E60E1F0DB6}" dt="2025-09-17T21:59:31.025" v="1399" actId="20577"/>
       <pc:docMkLst>
         <pc:docMk/>
       </pc:docMkLst>
       <pc:sldChg chg="modSp add del mod">
-        <pc:chgData name="Kaitlyn Fitzgerald" userId="5f80a7dc-562f-4413-9d6e-37134f387a9f" providerId="ADAL" clId="{FC2319E2-36D7-52E6-A55A-33E60E1F0DB6}" dt="2025-09-16T22:32:16.971" v="33" actId="20577"/>
+        <pc:chgData name="Kaitlyn Fitzgerald" userId="5f80a7dc-562f-4413-9d6e-37134f387a9f" providerId="ADAL" clId="{FC2319E2-36D7-52E6-A55A-33E60E1F0DB6}" dt="2025-09-17T21:58:01.315" v="1385" actId="2696"/>
         <pc:sldMkLst>
           <pc:docMk/>
           <pc:sldMk cId="3926184477" sldId="300"/>
@@ -583,8 +581,8 @@
           </ac:spMkLst>
         </pc:spChg>
       </pc:sldChg>
-      <pc:sldChg chg="modSp mod">
-        <pc:chgData name="Kaitlyn Fitzgerald" userId="5f80a7dc-562f-4413-9d6e-37134f387a9f" providerId="ADAL" clId="{FC2319E2-36D7-52E6-A55A-33E60E1F0DB6}" dt="2025-09-16T22:34:07.483" v="63" actId="20577"/>
+      <pc:sldChg chg="modSp del mod">
+        <pc:chgData name="Kaitlyn Fitzgerald" userId="5f80a7dc-562f-4413-9d6e-37134f387a9f" providerId="ADAL" clId="{FC2319E2-36D7-52E6-A55A-33E60E1F0DB6}" dt="2025-09-17T21:57:39.321" v="1384" actId="2696"/>
         <pc:sldMkLst>
           <pc:docMk/>
           <pc:sldMk cId="4001161195" sldId="402"/>
@@ -925,7 +923,7 @@
         </pc:sldMkLst>
       </pc:sldChg>
       <pc:sldChg chg="modSp new mod">
-        <pc:chgData name="Kaitlyn Fitzgerald" userId="5f80a7dc-562f-4413-9d6e-37134f387a9f" providerId="ADAL" clId="{FC2319E2-36D7-52E6-A55A-33E60E1F0DB6}" dt="2025-09-16T22:36:47.983" v="147" actId="20577"/>
+        <pc:chgData name="Kaitlyn Fitzgerald" userId="5f80a7dc-562f-4413-9d6e-37134f387a9f" providerId="ADAL" clId="{FC2319E2-36D7-52E6-A55A-33E60E1F0DB6}" dt="2025-09-17T21:59:31.025" v="1399" actId="20577"/>
         <pc:sldMkLst>
           <pc:docMk/>
           <pc:sldMk cId="2054609304" sldId="502"/>
@@ -939,7 +937,7 @@
           </ac:spMkLst>
         </pc:spChg>
         <pc:spChg chg="mod">
-          <ac:chgData name="Kaitlyn Fitzgerald" userId="5f80a7dc-562f-4413-9d6e-37134f387a9f" providerId="ADAL" clId="{FC2319E2-36D7-52E6-A55A-33E60E1F0DB6}" dt="2025-09-16T22:36:47.983" v="147" actId="20577"/>
+          <ac:chgData name="Kaitlyn Fitzgerald" userId="5f80a7dc-562f-4413-9d6e-37134f387a9f" providerId="ADAL" clId="{FC2319E2-36D7-52E6-A55A-33E60E1F0DB6}" dt="2025-09-17T21:59:31.025" v="1399" actId="20577"/>
           <ac:spMkLst>
             <pc:docMk/>
             <pc:sldMk cId="2054609304" sldId="502"/>
@@ -2550,7 +2548,7 @@
             <a:fld id="{59A896AA-6E09-42BA-AEDC-D783FD0D5099}" type="slidenum">
               <a:rPr lang="en-US" smtClean="0"/>
               <a:pPr/>
-              <a:t>11</a:t>
+              <a:t>9</a:t>
             </a:fld>
             <a:endParaRPr lang="en-US"/>
           </a:p>
@@ -2642,7 +2640,7 @@
             <a:fld id="{59A896AA-6E09-42BA-AEDC-D783FD0D5099}" type="slidenum">
               <a:rPr lang="en-US" smtClean="0"/>
               <a:pPr/>
-              <a:t>18</a:t>
+              <a:t>16</a:t>
             </a:fld>
             <a:endParaRPr lang="en-US"/>
           </a:p>
@@ -2730,7 +2728,7 @@
             <a:fld id="{59A896AA-6E09-42BA-AEDC-D783FD0D5099}" type="slidenum">
               <a:rPr lang="en-US" smtClean="0"/>
               <a:pPr/>
-              <a:t>22</a:t>
+              <a:t>20</a:t>
             </a:fld>
             <a:endParaRPr lang="en-US"/>
           </a:p>
@@ -6534,1381 +6532,6 @@
           <a:lstStyle/>
           <a:p>
             <a:r>
-              <a:rPr lang="en-US" dirty="0"/>
-              <a:t>Concatenation and Trimming</a:t>
-            </a:r>
-          </a:p>
-        </p:txBody>
-      </p:sp>
-      <p:sp>
-        <p:nvSpPr>
-          <p:cNvPr id="3" name="Content Placeholder 2"/>
-          <p:cNvSpPr>
-            <a:spLocks noGrp="1"/>
-          </p:cNvSpPr>
-          <p:nvPr>
-            <p:ph idx="1"/>
-          </p:nvPr>
-        </p:nvSpPr>
-        <p:spPr>
-          <a:xfrm>
-            <a:off x="494370" y="1524000"/>
-            <a:ext cx="8954429" cy="4525963"/>
-          </a:xfrm>
-        </p:spPr>
-        <p:txBody>
-          <a:bodyPr/>
-          <a:lstStyle/>
-          <a:p>
-            <a:r>
-              <a:rPr lang="en-US" sz="2000" dirty="0"/>
-              <a:t>Concatenation: </a:t>
-            </a:r>
-            <a:r>
-              <a:rPr lang="en-US" sz="2000" dirty="0">
-                <a:solidFill>
-                  <a:srgbClr val="FFFF00"/>
-                </a:solidFill>
-              </a:rPr>
-              <a:t>||</a:t>
-            </a:r>
-          </a:p>
-          <a:p>
-            <a:pPr lvl="1"/>
-            <a:r>
-              <a:rPr lang="en-US" sz="2000" dirty="0"/>
-              <a:t>Combines text variables into one</a:t>
-            </a:r>
-          </a:p>
-          <a:p>
-            <a:pPr marL="457200" lvl="1" indent="0">
-              <a:buNone/>
-            </a:pPr>
-            <a:r>
-              <a:rPr lang="en-US" sz="2000" dirty="0"/>
-              <a:t>	</a:t>
-            </a:r>
-            <a:r>
-              <a:rPr lang="en-US" sz="2000" dirty="0" err="1">
-                <a:solidFill>
-                  <a:srgbClr val="FFFF00"/>
-                </a:solidFill>
-              </a:rPr>
-              <a:t>fullname</a:t>
-            </a:r>
-            <a:r>
-              <a:rPr lang="en-US" sz="2000" dirty="0">
-                <a:solidFill>
-                  <a:srgbClr val="FFFF00"/>
-                </a:solidFill>
-              </a:rPr>
-              <a:t> = </a:t>
-            </a:r>
-            <a:r>
-              <a:rPr lang="en-US" sz="2000" dirty="0" err="1">
-                <a:solidFill>
-                  <a:srgbClr val="FFFF00"/>
-                </a:solidFill>
-              </a:rPr>
-              <a:t>firstname</a:t>
-            </a:r>
-            <a:r>
-              <a:rPr lang="en-US" sz="2000" dirty="0">
-                <a:solidFill>
-                  <a:srgbClr val="FFFF00"/>
-                </a:solidFill>
-              </a:rPr>
-              <a:t> || ‘ ‘ || </a:t>
-            </a:r>
-            <a:r>
-              <a:rPr lang="en-US" sz="2000" dirty="0" err="1">
-                <a:solidFill>
-                  <a:srgbClr val="FFFF00"/>
-                </a:solidFill>
-              </a:rPr>
-              <a:t>lastname</a:t>
-            </a:r>
-            <a:r>
-              <a:rPr lang="en-US" sz="2000" dirty="0">
-                <a:solidFill>
-                  <a:srgbClr val="FFFF00"/>
-                </a:solidFill>
-              </a:rPr>
-              <a:t>;</a:t>
-            </a:r>
-          </a:p>
-          <a:p>
-            <a:pPr marL="457200" lvl="1" indent="0">
-              <a:buNone/>
-            </a:pPr>
-            <a:r>
-              <a:rPr lang="en-US" sz="2000" dirty="0"/>
-              <a:t>	</a:t>
-            </a:r>
-            <a:r>
-              <a:rPr lang="en-US" sz="2000" dirty="0" err="1">
-                <a:solidFill>
-                  <a:schemeClr val="tx2">
-                    <a:lumMod val="75000"/>
-                  </a:schemeClr>
-                </a:solidFill>
-              </a:rPr>
-              <a:t>firstname</a:t>
-            </a:r>
-            <a:r>
-              <a:rPr lang="en-US" sz="2000" dirty="0">
-                <a:solidFill>
-                  <a:schemeClr val="tx2">
-                    <a:lumMod val="75000"/>
-                  </a:schemeClr>
-                </a:solidFill>
-              </a:rPr>
-              <a:t> = ‘Wendy’ </a:t>
-            </a:r>
-            <a:r>
-              <a:rPr lang="en-US" sz="2000" dirty="0"/>
-              <a:t>and </a:t>
-            </a:r>
-            <a:r>
-              <a:rPr lang="en-US" sz="2000" dirty="0" err="1">
-                <a:solidFill>
-                  <a:schemeClr val="tx2">
-                    <a:lumMod val="75000"/>
-                  </a:schemeClr>
-                </a:solidFill>
-              </a:rPr>
-              <a:t>lastname</a:t>
-            </a:r>
-            <a:r>
-              <a:rPr lang="en-US" sz="2000" dirty="0">
-                <a:solidFill>
-                  <a:schemeClr val="tx2">
-                    <a:lumMod val="75000"/>
-                  </a:schemeClr>
-                </a:solidFill>
-              </a:rPr>
-              <a:t> = ‘Smith’</a:t>
-            </a:r>
-          </a:p>
-          <a:p>
-            <a:pPr marL="457200" lvl="1" indent="0">
-              <a:buNone/>
-            </a:pPr>
-            <a:r>
-              <a:rPr lang="en-US" sz="2000" dirty="0"/>
-              <a:t>	becomes </a:t>
-            </a:r>
-            <a:r>
-              <a:rPr lang="en-US" sz="2000" dirty="0" err="1">
-                <a:solidFill>
-                  <a:schemeClr val="tx2">
-                    <a:lumMod val="75000"/>
-                  </a:schemeClr>
-                </a:solidFill>
-              </a:rPr>
-              <a:t>fullname</a:t>
-            </a:r>
-            <a:r>
-              <a:rPr lang="en-US" sz="2000" dirty="0">
-                <a:solidFill>
-                  <a:schemeClr val="tx2">
-                    <a:lumMod val="75000"/>
-                  </a:schemeClr>
-                </a:solidFill>
-              </a:rPr>
-              <a:t> = ‘Wendy Smith’</a:t>
-            </a:r>
-          </a:p>
-          <a:p>
-            <a:r>
-              <a:rPr lang="en-US" sz="2000" dirty="0">
-                <a:solidFill>
-                  <a:srgbClr val="FFFF00"/>
-                </a:solidFill>
-              </a:rPr>
-              <a:t>LEFT</a:t>
-            </a:r>
-            <a:r>
-              <a:rPr lang="en-US" sz="2000" dirty="0"/>
-              <a:t>, </a:t>
-            </a:r>
-            <a:r>
-              <a:rPr lang="en-US" sz="2000" dirty="0">
-                <a:solidFill>
-                  <a:srgbClr val="FFFF00"/>
-                </a:solidFill>
-              </a:rPr>
-              <a:t>RIGHT</a:t>
-            </a:r>
-            <a:r>
-              <a:rPr lang="en-US" sz="2000" dirty="0"/>
-              <a:t>, </a:t>
-            </a:r>
-            <a:r>
-              <a:rPr lang="en-US" sz="2000" dirty="0">
-                <a:solidFill>
-                  <a:srgbClr val="FFFF00"/>
-                </a:solidFill>
-              </a:rPr>
-              <a:t>TRIM</a:t>
-            </a:r>
-            <a:r>
-              <a:rPr lang="en-US" sz="2000" dirty="0"/>
-              <a:t>, </a:t>
-            </a:r>
-            <a:r>
-              <a:rPr lang="en-US" sz="2000" dirty="0">
-                <a:solidFill>
-                  <a:srgbClr val="FFFF00"/>
-                </a:solidFill>
-              </a:rPr>
-              <a:t>COMPRESS</a:t>
-            </a:r>
-          </a:p>
-          <a:p>
-            <a:pPr lvl="1"/>
-            <a:r>
-              <a:rPr lang="en-US" sz="2000" dirty="0"/>
-              <a:t>Removes blanks from variables</a:t>
-            </a:r>
-          </a:p>
-          <a:p>
-            <a:pPr lvl="1"/>
-            <a:r>
-              <a:rPr lang="en-US" sz="2000" dirty="0">
-                <a:solidFill>
-                  <a:srgbClr val="FFFF00"/>
-                </a:solidFill>
-              </a:rPr>
-              <a:t>LEFT</a:t>
-            </a:r>
-            <a:r>
-              <a:rPr lang="en-US" sz="2000" dirty="0"/>
-              <a:t> and </a:t>
-            </a:r>
-            <a:r>
-              <a:rPr lang="en-US" sz="2000" dirty="0">
-                <a:solidFill>
-                  <a:srgbClr val="FFFF00"/>
-                </a:solidFill>
-              </a:rPr>
-              <a:t>RIGHT</a:t>
-            </a:r>
-            <a:r>
-              <a:rPr lang="en-US" sz="2000" dirty="0"/>
-              <a:t> align the string</a:t>
-            </a:r>
-          </a:p>
-          <a:p>
-            <a:pPr lvl="1"/>
-            <a:r>
-              <a:rPr lang="en-US" sz="2000" dirty="0">
-                <a:solidFill>
-                  <a:srgbClr val="FFFF00"/>
-                </a:solidFill>
-              </a:rPr>
-              <a:t>TRIM</a:t>
-            </a:r>
-            <a:r>
-              <a:rPr lang="en-US" sz="2000" dirty="0"/>
-              <a:t> removes trailing blanks</a:t>
-            </a:r>
-          </a:p>
-          <a:p>
-            <a:pPr lvl="1"/>
-            <a:r>
-              <a:rPr lang="en-US" sz="2000" dirty="0">
-                <a:solidFill>
-                  <a:srgbClr val="FFFF00"/>
-                </a:solidFill>
-              </a:rPr>
-              <a:t>COMPRESS</a:t>
-            </a:r>
-            <a:r>
-              <a:rPr lang="en-US" sz="2000" dirty="0"/>
-              <a:t> removes all blanks (or other)</a:t>
-            </a:r>
-          </a:p>
-          <a:p>
-            <a:pPr marL="914400" lvl="2" indent="0">
-              <a:buNone/>
-            </a:pPr>
-            <a:r>
-              <a:rPr lang="en-US" sz="1600" dirty="0">
-                <a:latin typeface="Courier New" panose="02070309020205020404" pitchFamily="49" charset="0"/>
-                <a:cs typeface="Courier New" panose="02070309020205020404" pitchFamily="49" charset="0"/>
-              </a:rPr>
-              <a:t>compress(variable, &lt;exact characters to remove&gt;, &lt;modifiers&gt;)</a:t>
-            </a:r>
-          </a:p>
-          <a:p>
-            <a:pPr marL="914400" lvl="2" indent="0">
-              <a:buNone/>
-            </a:pPr>
-            <a:r>
-              <a:rPr lang="en-US" sz="1600" dirty="0">
-                <a:latin typeface="Courier New" panose="02070309020205020404" pitchFamily="49" charset="0"/>
-                <a:cs typeface="Courier New" panose="02070309020205020404" pitchFamily="49" charset="0"/>
-              </a:rPr>
-              <a:t>compress(variable) will remove spaces by default</a:t>
-            </a:r>
-          </a:p>
-          <a:p>
-            <a:pPr marL="457200" lvl="1" indent="0">
-              <a:buNone/>
-            </a:pPr>
-            <a:r>
-              <a:rPr lang="en-US" sz="1600" dirty="0">
-                <a:latin typeface="Courier New" panose="02070309020205020404" pitchFamily="49" charset="0"/>
-                <a:cs typeface="Courier New" panose="02070309020205020404" pitchFamily="49" charset="0"/>
-              </a:rPr>
-              <a:t>	compress(variable, , ‘</a:t>
-            </a:r>
-            <a:r>
-              <a:rPr lang="en-US" sz="1600" dirty="0" err="1">
-                <a:latin typeface="Courier New" panose="02070309020205020404" pitchFamily="49" charset="0"/>
-                <a:cs typeface="Courier New" panose="02070309020205020404" pitchFamily="49" charset="0"/>
-              </a:rPr>
-              <a:t>kd</a:t>
-            </a:r>
-            <a:r>
-              <a:rPr lang="en-US" sz="1600" dirty="0">
-                <a:latin typeface="Courier New" panose="02070309020205020404" pitchFamily="49" charset="0"/>
-                <a:cs typeface="Courier New" panose="02070309020205020404" pitchFamily="49" charset="0"/>
-              </a:rPr>
-              <a:t>’) will keep numeric digits</a:t>
-            </a:r>
-          </a:p>
-          <a:p>
-            <a:pPr marL="457200" lvl="1" indent="0">
-              <a:buNone/>
-            </a:pPr>
-            <a:r>
-              <a:rPr lang="en-US" sz="1600" dirty="0">
-                <a:latin typeface="Courier New" panose="02070309020205020404" pitchFamily="49" charset="0"/>
-                <a:cs typeface="Courier New" panose="02070309020205020404" pitchFamily="49" charset="0"/>
-              </a:rPr>
-              <a:t>	compress(variable, , ‘d’) will remove numeric digits</a:t>
-            </a:r>
-          </a:p>
-          <a:p>
-            <a:pPr marL="457200" lvl="1" indent="0">
-              <a:buNone/>
-            </a:pPr>
-            <a:r>
-              <a:rPr lang="en-US" sz="1600" dirty="0"/>
-              <a:t>	</a:t>
-            </a:r>
-          </a:p>
-        </p:txBody>
-      </p:sp>
-    </p:spTree>
-    <p:extLst>
-      <p:ext uri="{BB962C8B-B14F-4D97-AF65-F5344CB8AC3E}">
-        <p14:creationId xmlns:p14="http://schemas.microsoft.com/office/powerpoint/2010/main" val="3022407107"/>
-      </p:ext>
-    </p:extLst>
-  </p:cSld>
-  <p:clrMapOvr>
-    <a:masterClrMapping/>
-  </p:clrMapOvr>
-  <p:timing>
-    <p:tnLst>
-      <p:par>
-        <p:cTn id="1" dur="indefinite" restart="never" nodeType="tmRoot">
-          <p:childTnLst>
-            <p:seq concurrent="1" nextAc="seek">
-              <p:cTn id="2" dur="indefinite" nodeType="mainSeq">
-                <p:childTnLst>
-                  <p:par>
-                    <p:cTn id="3" fill="hold">
-                      <p:stCondLst>
-                        <p:cond delay="indefinite"/>
-                      </p:stCondLst>
-                      <p:childTnLst>
-                        <p:par>
-                          <p:cTn id="4" fill="hold">
-                            <p:stCondLst>
-                              <p:cond delay="0"/>
-                            </p:stCondLst>
-                            <p:childTnLst>
-                              <p:par>
-                                <p:cTn id="5" presetID="22" presetClass="entr" presetSubtype="8" fill="hold" grpId="0" nodeType="clickEffect">
-                                  <p:stCondLst>
-                                    <p:cond delay="0"/>
-                                  </p:stCondLst>
-                                  <p:childTnLst>
-                                    <p:set>
-                                      <p:cBhvr>
-                                        <p:cTn id="6" dur="1" fill="hold">
-                                          <p:stCondLst>
-                                            <p:cond delay="0"/>
-                                          </p:stCondLst>
-                                        </p:cTn>
-                                        <p:tgtEl>
-                                          <p:spTgt spid="3">
-                                            <p:txEl>
-                                              <p:pRg st="5" end="5"/>
-                                            </p:txEl>
-                                          </p:spTgt>
-                                        </p:tgtEl>
-                                        <p:attrNameLst>
-                                          <p:attrName>style.visibility</p:attrName>
-                                        </p:attrNameLst>
-                                      </p:cBhvr>
-                                      <p:to>
-                                        <p:strVal val="visible"/>
-                                      </p:to>
-                                    </p:set>
-                                    <p:animEffect transition="in" filter="wipe(left)">
-                                      <p:cBhvr>
-                                        <p:cTn id="7" dur="500"/>
-                                        <p:tgtEl>
-                                          <p:spTgt spid="3">
-                                            <p:txEl>
-                                              <p:pRg st="5" end="5"/>
-                                            </p:txEl>
-                                          </p:spTgt>
-                                        </p:tgtEl>
-                                      </p:cBhvr>
-                                    </p:animEffect>
-                                  </p:childTnLst>
-                                </p:cTn>
-                              </p:par>
-                              <p:par>
-                                <p:cTn id="8" presetID="22" presetClass="entr" presetSubtype="8" fill="hold" grpId="0" nodeType="withEffect">
-                                  <p:stCondLst>
-                                    <p:cond delay="0"/>
-                                  </p:stCondLst>
-                                  <p:childTnLst>
-                                    <p:set>
-                                      <p:cBhvr>
-                                        <p:cTn id="9" dur="1" fill="hold">
-                                          <p:stCondLst>
-                                            <p:cond delay="0"/>
-                                          </p:stCondLst>
-                                        </p:cTn>
-                                        <p:tgtEl>
-                                          <p:spTgt spid="3">
-                                            <p:txEl>
-                                              <p:pRg st="6" end="6"/>
-                                            </p:txEl>
-                                          </p:spTgt>
-                                        </p:tgtEl>
-                                        <p:attrNameLst>
-                                          <p:attrName>style.visibility</p:attrName>
-                                        </p:attrNameLst>
-                                      </p:cBhvr>
-                                      <p:to>
-                                        <p:strVal val="visible"/>
-                                      </p:to>
-                                    </p:set>
-                                    <p:animEffect transition="in" filter="wipe(left)">
-                                      <p:cBhvr>
-                                        <p:cTn id="10" dur="500"/>
-                                        <p:tgtEl>
-                                          <p:spTgt spid="3">
-                                            <p:txEl>
-                                              <p:pRg st="6" end="6"/>
-                                            </p:txEl>
-                                          </p:spTgt>
-                                        </p:tgtEl>
-                                      </p:cBhvr>
-                                    </p:animEffect>
-                                  </p:childTnLst>
-                                </p:cTn>
-                              </p:par>
-                              <p:par>
-                                <p:cTn id="11" presetID="22" presetClass="entr" presetSubtype="8" fill="hold" grpId="0" nodeType="withEffect">
-                                  <p:stCondLst>
-                                    <p:cond delay="0"/>
-                                  </p:stCondLst>
-                                  <p:childTnLst>
-                                    <p:set>
-                                      <p:cBhvr>
-                                        <p:cTn id="12" dur="1" fill="hold">
-                                          <p:stCondLst>
-                                            <p:cond delay="0"/>
-                                          </p:stCondLst>
-                                        </p:cTn>
-                                        <p:tgtEl>
-                                          <p:spTgt spid="3">
-                                            <p:txEl>
-                                              <p:pRg st="7" end="7"/>
-                                            </p:txEl>
-                                          </p:spTgt>
-                                        </p:tgtEl>
-                                        <p:attrNameLst>
-                                          <p:attrName>style.visibility</p:attrName>
-                                        </p:attrNameLst>
-                                      </p:cBhvr>
-                                      <p:to>
-                                        <p:strVal val="visible"/>
-                                      </p:to>
-                                    </p:set>
-                                    <p:animEffect transition="in" filter="wipe(left)">
-                                      <p:cBhvr>
-                                        <p:cTn id="13" dur="500"/>
-                                        <p:tgtEl>
-                                          <p:spTgt spid="3">
-                                            <p:txEl>
-                                              <p:pRg st="7" end="7"/>
-                                            </p:txEl>
-                                          </p:spTgt>
-                                        </p:tgtEl>
-                                      </p:cBhvr>
-                                    </p:animEffect>
-                                  </p:childTnLst>
-                                </p:cTn>
-                              </p:par>
-                              <p:par>
-                                <p:cTn id="14" presetID="22" presetClass="entr" presetSubtype="8" fill="hold" grpId="0" nodeType="withEffect">
-                                  <p:stCondLst>
-                                    <p:cond delay="0"/>
-                                  </p:stCondLst>
-                                  <p:childTnLst>
-                                    <p:set>
-                                      <p:cBhvr>
-                                        <p:cTn id="15" dur="1" fill="hold">
-                                          <p:stCondLst>
-                                            <p:cond delay="0"/>
-                                          </p:stCondLst>
-                                        </p:cTn>
-                                        <p:tgtEl>
-                                          <p:spTgt spid="3">
-                                            <p:txEl>
-                                              <p:pRg st="8" end="8"/>
-                                            </p:txEl>
-                                          </p:spTgt>
-                                        </p:tgtEl>
-                                        <p:attrNameLst>
-                                          <p:attrName>style.visibility</p:attrName>
-                                        </p:attrNameLst>
-                                      </p:cBhvr>
-                                      <p:to>
-                                        <p:strVal val="visible"/>
-                                      </p:to>
-                                    </p:set>
-                                    <p:animEffect transition="in" filter="wipe(left)">
-                                      <p:cBhvr>
-                                        <p:cTn id="16" dur="500"/>
-                                        <p:tgtEl>
-                                          <p:spTgt spid="3">
-                                            <p:txEl>
-                                              <p:pRg st="8" end="8"/>
-                                            </p:txEl>
-                                          </p:spTgt>
-                                        </p:tgtEl>
-                                      </p:cBhvr>
-                                    </p:animEffect>
-                                  </p:childTnLst>
-                                </p:cTn>
-                              </p:par>
-                              <p:par>
-                                <p:cTn id="17" presetID="22" presetClass="entr" presetSubtype="8" fill="hold" grpId="0" nodeType="withEffect">
-                                  <p:stCondLst>
-                                    <p:cond delay="0"/>
-                                  </p:stCondLst>
-                                  <p:childTnLst>
-                                    <p:set>
-                                      <p:cBhvr>
-                                        <p:cTn id="18" dur="1" fill="hold">
-                                          <p:stCondLst>
-                                            <p:cond delay="0"/>
-                                          </p:stCondLst>
-                                        </p:cTn>
-                                        <p:tgtEl>
-                                          <p:spTgt spid="3">
-                                            <p:txEl>
-                                              <p:pRg st="9" end="9"/>
-                                            </p:txEl>
-                                          </p:spTgt>
-                                        </p:tgtEl>
-                                        <p:attrNameLst>
-                                          <p:attrName>style.visibility</p:attrName>
-                                        </p:attrNameLst>
-                                      </p:cBhvr>
-                                      <p:to>
-                                        <p:strVal val="visible"/>
-                                      </p:to>
-                                    </p:set>
-                                    <p:animEffect transition="in" filter="wipe(left)">
-                                      <p:cBhvr>
-                                        <p:cTn id="19" dur="500"/>
-                                        <p:tgtEl>
-                                          <p:spTgt spid="3">
-                                            <p:txEl>
-                                              <p:pRg st="9" end="9"/>
-                                            </p:txEl>
-                                          </p:spTgt>
-                                        </p:tgtEl>
-                                      </p:cBhvr>
-                                    </p:animEffect>
-                                  </p:childTnLst>
-                                </p:cTn>
-                              </p:par>
-                              <p:par>
-                                <p:cTn id="20" presetID="22" presetClass="entr" presetSubtype="8" fill="hold" grpId="0" nodeType="withEffect">
-                                  <p:stCondLst>
-                                    <p:cond delay="0"/>
-                                  </p:stCondLst>
-                                  <p:childTnLst>
-                                    <p:set>
-                                      <p:cBhvr>
-                                        <p:cTn id="21" dur="1" fill="hold">
-                                          <p:stCondLst>
-                                            <p:cond delay="0"/>
-                                          </p:stCondLst>
-                                        </p:cTn>
-                                        <p:tgtEl>
-                                          <p:spTgt spid="3">
-                                            <p:txEl>
-                                              <p:pRg st="10" end="10"/>
-                                            </p:txEl>
-                                          </p:spTgt>
-                                        </p:tgtEl>
-                                        <p:attrNameLst>
-                                          <p:attrName>style.visibility</p:attrName>
-                                        </p:attrNameLst>
-                                      </p:cBhvr>
-                                      <p:to>
-                                        <p:strVal val="visible"/>
-                                      </p:to>
-                                    </p:set>
-                                    <p:animEffect transition="in" filter="wipe(left)">
-                                      <p:cBhvr>
-                                        <p:cTn id="22" dur="500"/>
-                                        <p:tgtEl>
-                                          <p:spTgt spid="3">
-                                            <p:txEl>
-                                              <p:pRg st="10" end="10"/>
-                                            </p:txEl>
-                                          </p:spTgt>
-                                        </p:tgtEl>
-                                      </p:cBhvr>
-                                    </p:animEffect>
-                                  </p:childTnLst>
-                                </p:cTn>
-                              </p:par>
-                              <p:par>
-                                <p:cTn id="23" presetID="22" presetClass="entr" presetSubtype="8" fill="hold" grpId="0" nodeType="withEffect">
-                                  <p:stCondLst>
-                                    <p:cond delay="0"/>
-                                  </p:stCondLst>
-                                  <p:childTnLst>
-                                    <p:set>
-                                      <p:cBhvr>
-                                        <p:cTn id="24" dur="1" fill="hold">
-                                          <p:stCondLst>
-                                            <p:cond delay="0"/>
-                                          </p:stCondLst>
-                                        </p:cTn>
-                                        <p:tgtEl>
-                                          <p:spTgt spid="3">
-                                            <p:txEl>
-                                              <p:pRg st="11" end="11"/>
-                                            </p:txEl>
-                                          </p:spTgt>
-                                        </p:tgtEl>
-                                        <p:attrNameLst>
-                                          <p:attrName>style.visibility</p:attrName>
-                                        </p:attrNameLst>
-                                      </p:cBhvr>
-                                      <p:to>
-                                        <p:strVal val="visible"/>
-                                      </p:to>
-                                    </p:set>
-                                    <p:animEffect transition="in" filter="wipe(left)">
-                                      <p:cBhvr>
-                                        <p:cTn id="25" dur="500"/>
-                                        <p:tgtEl>
-                                          <p:spTgt spid="3">
-                                            <p:txEl>
-                                              <p:pRg st="11" end="11"/>
-                                            </p:txEl>
-                                          </p:spTgt>
-                                        </p:tgtEl>
-                                      </p:cBhvr>
-                                    </p:animEffect>
-                                  </p:childTnLst>
-                                </p:cTn>
-                              </p:par>
-                              <p:par>
-                                <p:cTn id="26" presetID="22" presetClass="entr" presetSubtype="8" fill="hold" grpId="0" nodeType="withEffect">
-                                  <p:stCondLst>
-                                    <p:cond delay="0"/>
-                                  </p:stCondLst>
-                                  <p:childTnLst>
-                                    <p:set>
-                                      <p:cBhvr>
-                                        <p:cTn id="27" dur="1" fill="hold">
-                                          <p:stCondLst>
-                                            <p:cond delay="0"/>
-                                          </p:stCondLst>
-                                        </p:cTn>
-                                        <p:tgtEl>
-                                          <p:spTgt spid="3">
-                                            <p:txEl>
-                                              <p:pRg st="12" end="12"/>
-                                            </p:txEl>
-                                          </p:spTgt>
-                                        </p:tgtEl>
-                                        <p:attrNameLst>
-                                          <p:attrName>style.visibility</p:attrName>
-                                        </p:attrNameLst>
-                                      </p:cBhvr>
-                                      <p:to>
-                                        <p:strVal val="visible"/>
-                                      </p:to>
-                                    </p:set>
-                                    <p:animEffect transition="in" filter="wipe(left)">
-                                      <p:cBhvr>
-                                        <p:cTn id="28" dur="500"/>
-                                        <p:tgtEl>
-                                          <p:spTgt spid="3">
-                                            <p:txEl>
-                                              <p:pRg st="12" end="12"/>
-                                            </p:txEl>
-                                          </p:spTgt>
-                                        </p:tgtEl>
-                                      </p:cBhvr>
-                                    </p:animEffect>
-                                  </p:childTnLst>
-                                </p:cTn>
-                              </p:par>
-                              <p:par>
-                                <p:cTn id="29" presetID="22" presetClass="entr" presetSubtype="8" fill="hold" grpId="0" nodeType="withEffect">
-                                  <p:stCondLst>
-                                    <p:cond delay="0"/>
-                                  </p:stCondLst>
-                                  <p:childTnLst>
-                                    <p:set>
-                                      <p:cBhvr>
-                                        <p:cTn id="30" dur="1" fill="hold">
-                                          <p:stCondLst>
-                                            <p:cond delay="0"/>
-                                          </p:stCondLst>
-                                        </p:cTn>
-                                        <p:tgtEl>
-                                          <p:spTgt spid="3">
-                                            <p:txEl>
-                                              <p:pRg st="13" end="13"/>
-                                            </p:txEl>
-                                          </p:spTgt>
-                                        </p:tgtEl>
-                                        <p:attrNameLst>
-                                          <p:attrName>style.visibility</p:attrName>
-                                        </p:attrNameLst>
-                                      </p:cBhvr>
-                                      <p:to>
-                                        <p:strVal val="visible"/>
-                                      </p:to>
-                                    </p:set>
-                                    <p:animEffect transition="in" filter="wipe(left)">
-                                      <p:cBhvr>
-                                        <p:cTn id="31" dur="500"/>
-                                        <p:tgtEl>
-                                          <p:spTgt spid="3">
-                                            <p:txEl>
-                                              <p:pRg st="13" end="13"/>
-                                            </p:txEl>
-                                          </p:spTgt>
-                                        </p:tgtEl>
-                                      </p:cBhvr>
-                                    </p:animEffect>
-                                  </p:childTnLst>
-                                </p:cTn>
-                              </p:par>
-                              <p:par>
-                                <p:cTn id="32" presetID="22" presetClass="entr" presetSubtype="8" fill="hold" grpId="0" nodeType="withEffect">
-                                  <p:stCondLst>
-                                    <p:cond delay="0"/>
-                                  </p:stCondLst>
-                                  <p:childTnLst>
-                                    <p:set>
-                                      <p:cBhvr>
-                                        <p:cTn id="33" dur="1" fill="hold">
-                                          <p:stCondLst>
-                                            <p:cond delay="0"/>
-                                          </p:stCondLst>
-                                        </p:cTn>
-                                        <p:tgtEl>
-                                          <p:spTgt spid="3">
-                                            <p:txEl>
-                                              <p:pRg st="14" end="14"/>
-                                            </p:txEl>
-                                          </p:spTgt>
-                                        </p:tgtEl>
-                                        <p:attrNameLst>
-                                          <p:attrName>style.visibility</p:attrName>
-                                        </p:attrNameLst>
-                                      </p:cBhvr>
-                                      <p:to>
-                                        <p:strVal val="visible"/>
-                                      </p:to>
-                                    </p:set>
-                                    <p:animEffect transition="in" filter="wipe(left)">
-                                      <p:cBhvr>
-                                        <p:cTn id="34" dur="500"/>
-                                        <p:tgtEl>
-                                          <p:spTgt spid="3">
-                                            <p:txEl>
-                                              <p:pRg st="14" end="14"/>
-                                            </p:txEl>
-                                          </p:spTgt>
-                                        </p:tgtEl>
-                                      </p:cBhvr>
-                                    </p:animEffect>
-                                  </p:childTnLst>
-                                </p:cTn>
-                              </p:par>
-                            </p:childTnLst>
-                          </p:cTn>
-                        </p:par>
-                      </p:childTnLst>
-                    </p:cTn>
-                  </p:par>
-                </p:childTnLst>
-              </p:cTn>
-              <p:prevCondLst>
-                <p:cond evt="onPrev" delay="0">
-                  <p:tgtEl>
-                    <p:sldTgt/>
-                  </p:tgtEl>
-                </p:cond>
-              </p:prevCondLst>
-              <p:nextCondLst>
-                <p:cond evt="onNext" delay="0">
-                  <p:tgtEl>
-                    <p:sldTgt/>
-                  </p:tgtEl>
-                </p:cond>
-              </p:nextCondLst>
-            </p:seq>
-          </p:childTnLst>
-        </p:cTn>
-      </p:par>
-    </p:tnLst>
-    <p:bldLst>
-      <p:bldP spid="3" grpId="0" uiExpand="1" build="p"/>
-    </p:bldLst>
-  </p:timing>
-</p:sld>
-</file>
-
-<file path=ppt/slides/slide11.xml><?xml version="1.0" encoding="utf-8"?>
-<p:sld xmlns:a="http://schemas.openxmlformats.org/drawingml/2006/main" xmlns:r="http://schemas.openxmlformats.org/officeDocument/2006/relationships" xmlns:p="http://schemas.openxmlformats.org/presentationml/2006/main">
-  <p:cSld>
-    <p:spTree>
-      <p:nvGrpSpPr>
-        <p:cNvPr id="1" name=""/>
-        <p:cNvGrpSpPr/>
-        <p:nvPr/>
-      </p:nvGrpSpPr>
-      <p:grpSpPr>
-        <a:xfrm>
-          <a:off x="0" y="0"/>
-          <a:ext cx="0" cy="0"/>
-          <a:chOff x="0" y="0"/>
-          <a:chExt cx="0" cy="0"/>
-        </a:xfrm>
-      </p:grpSpPr>
-      <p:sp>
-        <p:nvSpPr>
-          <p:cNvPr id="2" name="Title 1"/>
-          <p:cNvSpPr>
-            <a:spLocks noGrp="1"/>
-          </p:cNvSpPr>
-          <p:nvPr>
-            <p:ph type="title"/>
-          </p:nvPr>
-        </p:nvSpPr>
-        <p:spPr/>
-        <p:txBody>
-          <a:bodyPr/>
-          <a:lstStyle/>
-          <a:p>
-            <a:r>
-              <a:rPr lang="en-US" dirty="0"/>
-              <a:t>Character </a:t>
-            </a:r>
-            <a:r>
-              <a:rPr lang="en-US" dirty="0">
-                <a:sym typeface="Wingdings" panose="05000000000000000000" pitchFamily="2" charset="2"/>
-              </a:rPr>
-              <a:t> </a:t>
-            </a:r>
-            <a:r>
-              <a:rPr lang="en-US" dirty="0"/>
-              <a:t>Numeric</a:t>
-            </a:r>
-          </a:p>
-        </p:txBody>
-      </p:sp>
-      <p:sp>
-        <p:nvSpPr>
-          <p:cNvPr id="3" name="Content Placeholder 2"/>
-          <p:cNvSpPr>
-            <a:spLocks noGrp="1"/>
-          </p:cNvSpPr>
-          <p:nvPr>
-            <p:ph idx="1"/>
-          </p:nvPr>
-        </p:nvSpPr>
-        <p:spPr/>
-        <p:txBody>
-          <a:bodyPr/>
-          <a:lstStyle/>
-          <a:p>
-            <a:r>
-              <a:rPr lang="en-US" dirty="0">
-                <a:solidFill>
-                  <a:srgbClr val="FFFF00"/>
-                </a:solidFill>
-              </a:rPr>
-              <a:t>PUT</a:t>
-            </a:r>
-            <a:r>
-              <a:rPr lang="en-US" dirty="0"/>
-              <a:t> – changes variable format</a:t>
-            </a:r>
-          </a:p>
-          <a:p>
-            <a:pPr lvl="1"/>
-            <a:r>
-              <a:rPr lang="en-US" dirty="0"/>
-              <a:t>Makes variable character</a:t>
-            </a:r>
-          </a:p>
-          <a:p>
-            <a:pPr marL="457200" lvl="1" indent="0">
-              <a:buNone/>
-            </a:pPr>
-            <a:r>
-              <a:rPr lang="en-US" dirty="0">
-                <a:solidFill>
-                  <a:schemeClr val="tx2">
-                    <a:lumMod val="75000"/>
-                  </a:schemeClr>
-                </a:solidFill>
-              </a:rPr>
-              <a:t>	</a:t>
-            </a:r>
-            <a:r>
-              <a:rPr lang="en-US" dirty="0" err="1">
-                <a:solidFill>
-                  <a:schemeClr val="tx2">
-                    <a:lumMod val="75000"/>
-                  </a:schemeClr>
-                </a:solidFill>
-              </a:rPr>
-              <a:t>idchar</a:t>
-            </a:r>
-            <a:r>
-              <a:rPr lang="en-US" dirty="0">
-                <a:solidFill>
-                  <a:schemeClr val="tx2">
-                    <a:lumMod val="75000"/>
-                  </a:schemeClr>
-                </a:solidFill>
-              </a:rPr>
-              <a:t> = put(idnum,$8.);</a:t>
-            </a:r>
-          </a:p>
-          <a:p>
-            <a:r>
-              <a:rPr lang="en-US" dirty="0">
-                <a:solidFill>
-                  <a:srgbClr val="FFFF00"/>
-                </a:solidFill>
-              </a:rPr>
-              <a:t>INPUT</a:t>
-            </a:r>
-            <a:r>
-              <a:rPr lang="en-US" dirty="0"/>
-              <a:t> – makes variable numeric</a:t>
-            </a:r>
-          </a:p>
-          <a:p>
-            <a:pPr marL="457200" lvl="1" indent="0">
-              <a:buNone/>
-            </a:pPr>
-            <a:r>
-              <a:rPr lang="en-US" dirty="0">
-                <a:solidFill>
-                  <a:schemeClr val="tx2">
-                    <a:lumMod val="75000"/>
-                  </a:schemeClr>
-                </a:solidFill>
-              </a:rPr>
-              <a:t>	</a:t>
-            </a:r>
-            <a:r>
-              <a:rPr lang="en-US" dirty="0" err="1">
-                <a:solidFill>
-                  <a:schemeClr val="tx2">
-                    <a:lumMod val="75000"/>
-                  </a:schemeClr>
-                </a:solidFill>
-              </a:rPr>
-              <a:t>idnum</a:t>
-            </a:r>
-            <a:r>
-              <a:rPr lang="en-US" dirty="0">
-                <a:solidFill>
-                  <a:schemeClr val="tx2">
-                    <a:lumMod val="75000"/>
-                  </a:schemeClr>
-                </a:solidFill>
-              </a:rPr>
-              <a:t> = input(idchar,8.);</a:t>
-            </a:r>
-          </a:p>
-          <a:p>
-            <a:pPr lvl="1"/>
-            <a:r>
-              <a:rPr lang="en-US" dirty="0"/>
-              <a:t>Alternative trick for converting to numeric: multiply by 1</a:t>
-            </a:r>
-          </a:p>
-          <a:p>
-            <a:pPr marL="457200" lvl="1" indent="0">
-              <a:buNone/>
-            </a:pPr>
-            <a:r>
-              <a:rPr lang="en-US" dirty="0"/>
-              <a:t>	</a:t>
-            </a:r>
-            <a:r>
-              <a:rPr lang="en-US" dirty="0" err="1">
-                <a:solidFill>
-                  <a:schemeClr val="tx2">
-                    <a:lumMod val="75000"/>
-                  </a:schemeClr>
-                </a:solidFill>
-              </a:rPr>
-              <a:t>idnum</a:t>
-            </a:r>
-            <a:r>
-              <a:rPr lang="en-US" dirty="0">
-                <a:solidFill>
-                  <a:schemeClr val="tx2">
-                    <a:lumMod val="75000"/>
-                  </a:schemeClr>
-                </a:solidFill>
-              </a:rPr>
-              <a:t> = </a:t>
-            </a:r>
-            <a:r>
-              <a:rPr lang="en-US" dirty="0" err="1">
-                <a:solidFill>
-                  <a:schemeClr val="tx2">
-                    <a:lumMod val="75000"/>
-                  </a:schemeClr>
-                </a:solidFill>
-              </a:rPr>
-              <a:t>idchar</a:t>
-            </a:r>
-            <a:r>
-              <a:rPr lang="en-US" dirty="0">
-                <a:solidFill>
-                  <a:schemeClr val="tx2">
-                    <a:lumMod val="75000"/>
-                  </a:schemeClr>
-                </a:solidFill>
-              </a:rPr>
-              <a:t> * 1;</a:t>
-            </a:r>
-          </a:p>
-          <a:p>
-            <a:endParaRPr lang="en-US" dirty="0"/>
-          </a:p>
-        </p:txBody>
-      </p:sp>
-    </p:spTree>
-    <p:extLst>
-      <p:ext uri="{BB962C8B-B14F-4D97-AF65-F5344CB8AC3E}">
-        <p14:creationId xmlns:p14="http://schemas.microsoft.com/office/powerpoint/2010/main" val="3659846075"/>
-      </p:ext>
-    </p:extLst>
-  </p:cSld>
-  <p:clrMapOvr>
-    <a:masterClrMapping/>
-  </p:clrMapOvr>
-  <p:timing>
-    <p:tnLst>
-      <p:par>
-        <p:cTn id="1" dur="indefinite" restart="never" nodeType="tmRoot">
-          <p:childTnLst>
-            <p:seq concurrent="1" nextAc="seek">
-              <p:cTn id="2" dur="indefinite" nodeType="mainSeq">
-                <p:childTnLst>
-                  <p:par>
-                    <p:cTn id="3" fill="hold">
-                      <p:stCondLst>
-                        <p:cond delay="indefinite"/>
-                      </p:stCondLst>
-                      <p:childTnLst>
-                        <p:par>
-                          <p:cTn id="4" fill="hold">
-                            <p:stCondLst>
-                              <p:cond delay="0"/>
-                            </p:stCondLst>
-                            <p:childTnLst>
-                              <p:par>
-                                <p:cTn id="5" presetID="22" presetClass="entr" presetSubtype="8" fill="hold" nodeType="clickEffect">
-                                  <p:stCondLst>
-                                    <p:cond delay="0"/>
-                                  </p:stCondLst>
-                                  <p:childTnLst>
-                                    <p:set>
-                                      <p:cBhvr>
-                                        <p:cTn id="6" dur="1" fill="hold">
-                                          <p:stCondLst>
-                                            <p:cond delay="0"/>
-                                          </p:stCondLst>
-                                        </p:cTn>
-                                        <p:tgtEl>
-                                          <p:spTgt spid="3">
-                                            <p:txEl>
-                                              <p:pRg st="3" end="3"/>
-                                            </p:txEl>
-                                          </p:spTgt>
-                                        </p:tgtEl>
-                                        <p:attrNameLst>
-                                          <p:attrName>style.visibility</p:attrName>
-                                        </p:attrNameLst>
-                                      </p:cBhvr>
-                                      <p:to>
-                                        <p:strVal val="visible"/>
-                                      </p:to>
-                                    </p:set>
-                                    <p:animEffect transition="in" filter="wipe(left)">
-                                      <p:cBhvr>
-                                        <p:cTn id="7" dur="500"/>
-                                        <p:tgtEl>
-                                          <p:spTgt spid="3">
-                                            <p:txEl>
-                                              <p:pRg st="3" end="3"/>
-                                            </p:txEl>
-                                          </p:spTgt>
-                                        </p:tgtEl>
-                                      </p:cBhvr>
-                                    </p:animEffect>
-                                  </p:childTnLst>
-                                </p:cTn>
-                              </p:par>
-                              <p:par>
-                                <p:cTn id="8" presetID="22" presetClass="entr" presetSubtype="8" fill="hold" nodeType="withEffect">
-                                  <p:stCondLst>
-                                    <p:cond delay="0"/>
-                                  </p:stCondLst>
-                                  <p:childTnLst>
-                                    <p:set>
-                                      <p:cBhvr>
-                                        <p:cTn id="9" dur="1" fill="hold">
-                                          <p:stCondLst>
-                                            <p:cond delay="0"/>
-                                          </p:stCondLst>
-                                        </p:cTn>
-                                        <p:tgtEl>
-                                          <p:spTgt spid="3">
-                                            <p:txEl>
-                                              <p:pRg st="4" end="4"/>
-                                            </p:txEl>
-                                          </p:spTgt>
-                                        </p:tgtEl>
-                                        <p:attrNameLst>
-                                          <p:attrName>style.visibility</p:attrName>
-                                        </p:attrNameLst>
-                                      </p:cBhvr>
-                                      <p:to>
-                                        <p:strVal val="visible"/>
-                                      </p:to>
-                                    </p:set>
-                                    <p:animEffect transition="in" filter="wipe(left)">
-                                      <p:cBhvr>
-                                        <p:cTn id="10" dur="500"/>
-                                        <p:tgtEl>
-                                          <p:spTgt spid="3">
-                                            <p:txEl>
-                                              <p:pRg st="4" end="4"/>
-                                            </p:txEl>
-                                          </p:spTgt>
-                                        </p:tgtEl>
-                                      </p:cBhvr>
-                                    </p:animEffect>
-                                  </p:childTnLst>
-                                </p:cTn>
-                              </p:par>
-                            </p:childTnLst>
-                          </p:cTn>
-                        </p:par>
-                      </p:childTnLst>
-                    </p:cTn>
-                  </p:par>
-                  <p:par>
-                    <p:cTn id="11" fill="hold">
-                      <p:stCondLst>
-                        <p:cond delay="indefinite"/>
-                      </p:stCondLst>
-                      <p:childTnLst>
-                        <p:par>
-                          <p:cTn id="12" fill="hold">
-                            <p:stCondLst>
-                              <p:cond delay="0"/>
-                            </p:stCondLst>
-                            <p:childTnLst>
-                              <p:par>
-                                <p:cTn id="13" presetID="22" presetClass="entr" presetSubtype="8" fill="hold" nodeType="clickEffect">
-                                  <p:stCondLst>
-                                    <p:cond delay="0"/>
-                                  </p:stCondLst>
-                                  <p:childTnLst>
-                                    <p:set>
-                                      <p:cBhvr>
-                                        <p:cTn id="14" dur="1" fill="hold">
-                                          <p:stCondLst>
-                                            <p:cond delay="0"/>
-                                          </p:stCondLst>
-                                        </p:cTn>
-                                        <p:tgtEl>
-                                          <p:spTgt spid="3">
-                                            <p:txEl>
-                                              <p:pRg st="5" end="5"/>
-                                            </p:txEl>
-                                          </p:spTgt>
-                                        </p:tgtEl>
-                                        <p:attrNameLst>
-                                          <p:attrName>style.visibility</p:attrName>
-                                        </p:attrNameLst>
-                                      </p:cBhvr>
-                                      <p:to>
-                                        <p:strVal val="visible"/>
-                                      </p:to>
-                                    </p:set>
-                                    <p:animEffect transition="in" filter="wipe(left)">
-                                      <p:cBhvr>
-                                        <p:cTn id="15" dur="500"/>
-                                        <p:tgtEl>
-                                          <p:spTgt spid="3">
-                                            <p:txEl>
-                                              <p:pRg st="5" end="5"/>
-                                            </p:txEl>
-                                          </p:spTgt>
-                                        </p:tgtEl>
-                                      </p:cBhvr>
-                                    </p:animEffect>
-                                  </p:childTnLst>
-                                </p:cTn>
-                              </p:par>
-                              <p:par>
-                                <p:cTn id="16" presetID="22" presetClass="entr" presetSubtype="8" fill="hold" nodeType="withEffect">
-                                  <p:stCondLst>
-                                    <p:cond delay="0"/>
-                                  </p:stCondLst>
-                                  <p:childTnLst>
-                                    <p:set>
-                                      <p:cBhvr>
-                                        <p:cTn id="17" dur="1" fill="hold">
-                                          <p:stCondLst>
-                                            <p:cond delay="0"/>
-                                          </p:stCondLst>
-                                        </p:cTn>
-                                        <p:tgtEl>
-                                          <p:spTgt spid="3">
-                                            <p:txEl>
-                                              <p:pRg st="6" end="6"/>
-                                            </p:txEl>
-                                          </p:spTgt>
-                                        </p:tgtEl>
-                                        <p:attrNameLst>
-                                          <p:attrName>style.visibility</p:attrName>
-                                        </p:attrNameLst>
-                                      </p:cBhvr>
-                                      <p:to>
-                                        <p:strVal val="visible"/>
-                                      </p:to>
-                                    </p:set>
-                                    <p:animEffect transition="in" filter="wipe(left)">
-                                      <p:cBhvr>
-                                        <p:cTn id="18" dur="500"/>
-                                        <p:tgtEl>
-                                          <p:spTgt spid="3">
-                                            <p:txEl>
-                                              <p:pRg st="6" end="6"/>
-                                            </p:txEl>
-                                          </p:spTgt>
-                                        </p:tgtEl>
-                                      </p:cBhvr>
-                                    </p:animEffect>
-                                  </p:childTnLst>
-                                </p:cTn>
-                              </p:par>
-                            </p:childTnLst>
-                          </p:cTn>
-                        </p:par>
-                      </p:childTnLst>
-                    </p:cTn>
-                  </p:par>
-                </p:childTnLst>
-              </p:cTn>
-              <p:prevCondLst>
-                <p:cond evt="onPrev" delay="0">
-                  <p:tgtEl>
-                    <p:sldTgt/>
-                  </p:tgtEl>
-                </p:cond>
-              </p:prevCondLst>
-              <p:nextCondLst>
-                <p:cond evt="onNext" delay="0">
-                  <p:tgtEl>
-                    <p:sldTgt/>
-                  </p:tgtEl>
-                </p:cond>
-              </p:nextCondLst>
-            </p:seq>
-          </p:childTnLst>
-        </p:cTn>
-      </p:par>
-    </p:tnLst>
-  </p:timing>
-</p:sld>
-</file>
-
-<file path=ppt/slides/slide12.xml><?xml version="1.0" encoding="utf-8"?>
-<p:sld xmlns:a="http://schemas.openxmlformats.org/drawingml/2006/main" xmlns:r="http://schemas.openxmlformats.org/officeDocument/2006/relationships" xmlns:p="http://schemas.openxmlformats.org/presentationml/2006/main">
-  <p:cSld>
-    <p:spTree>
-      <p:nvGrpSpPr>
-        <p:cNvPr id="1" name=""/>
-        <p:cNvGrpSpPr/>
-        <p:nvPr/>
-      </p:nvGrpSpPr>
-      <p:grpSpPr>
-        <a:xfrm>
-          <a:off x="0" y="0"/>
-          <a:ext cx="0" cy="0"/>
-          <a:chOff x="0" y="0"/>
-          <a:chExt cx="0" cy="0"/>
-        </a:xfrm>
-      </p:grpSpPr>
-      <p:sp>
-        <p:nvSpPr>
-          <p:cNvPr id="2" name="Title 1"/>
-          <p:cNvSpPr>
-            <a:spLocks noGrp="1"/>
-          </p:cNvSpPr>
-          <p:nvPr>
-            <p:ph type="title"/>
-          </p:nvPr>
-        </p:nvSpPr>
-        <p:spPr/>
-        <p:txBody>
-          <a:bodyPr/>
-          <a:lstStyle/>
-          <a:p>
-            <a:r>
               <a:rPr lang="en-US" dirty="0" err="1"/>
               <a:t>Subsetting</a:t>
             </a:r>
@@ -8415,7 +7038,7 @@
 </p:sld>
 </file>
 
-<file path=ppt/slides/slide13.xml><?xml version="1.0" encoding="utf-8"?>
+<file path=ppt/slides/slide11.xml><?xml version="1.0" encoding="utf-8"?>
 <p:sld xmlns:a="http://schemas.openxmlformats.org/drawingml/2006/main" xmlns:r="http://schemas.openxmlformats.org/officeDocument/2006/relationships" xmlns:p="http://schemas.openxmlformats.org/presentationml/2006/main">
   <p:cSld>
     <p:spTree>
@@ -9220,7 +7843,7 @@
 </p:sld>
 </file>
 
-<file path=ppt/slides/slide14.xml><?xml version="1.0" encoding="utf-8"?>
+<file path=ppt/slides/slide12.xml><?xml version="1.0" encoding="utf-8"?>
 <p:sld xmlns:a="http://schemas.openxmlformats.org/drawingml/2006/main" xmlns:r="http://schemas.openxmlformats.org/officeDocument/2006/relationships" xmlns:p="http://schemas.openxmlformats.org/presentationml/2006/main">
   <p:cSld>
     <p:spTree>
@@ -10000,7 +8623,7 @@
 </p:sld>
 </file>
 
-<file path=ppt/slides/slide15.xml><?xml version="1.0" encoding="utf-8"?>
+<file path=ppt/slides/slide13.xml><?xml version="1.0" encoding="utf-8"?>
 <p:sld xmlns:a="http://schemas.openxmlformats.org/drawingml/2006/main" xmlns:r="http://schemas.openxmlformats.org/officeDocument/2006/relationships" xmlns:p="http://schemas.openxmlformats.org/presentationml/2006/main">
   <p:cSld>
     <p:spTree>
@@ -10447,7 +9070,7 @@
 </p:sld>
 </file>
 
-<file path=ppt/slides/slide16.xml><?xml version="1.0" encoding="utf-8"?>
+<file path=ppt/slides/slide14.xml><?xml version="1.0" encoding="utf-8"?>
 <p:sld xmlns:a="http://schemas.openxmlformats.org/drawingml/2006/main" xmlns:r="http://schemas.openxmlformats.org/officeDocument/2006/relationships" xmlns:p="http://schemas.openxmlformats.org/presentationml/2006/main">
   <p:cSld>
     <p:spTree>
@@ -10717,7 +9340,7 @@
 </p:sld>
 </file>
 
-<file path=ppt/slides/slide17.xml><?xml version="1.0" encoding="utf-8"?>
+<file path=ppt/slides/slide15.xml><?xml version="1.0" encoding="utf-8"?>
 <p:sld xmlns:a="http://schemas.openxmlformats.org/drawingml/2006/main" xmlns:r="http://schemas.openxmlformats.org/officeDocument/2006/relationships" xmlns:p="http://schemas.openxmlformats.org/presentationml/2006/main">
   <p:cSld>
     <p:spTree>
@@ -11407,7 +10030,7 @@
 </p:sld>
 </file>
 
-<file path=ppt/slides/slide18.xml><?xml version="1.0" encoding="utf-8"?>
+<file path=ppt/slides/slide16.xml><?xml version="1.0" encoding="utf-8"?>
 <p:sld xmlns:a="http://schemas.openxmlformats.org/drawingml/2006/main" xmlns:r="http://schemas.openxmlformats.org/officeDocument/2006/relationships" xmlns:p="http://schemas.openxmlformats.org/presentationml/2006/main">
   <p:cSld>
     <p:spTree>
@@ -11699,7 +10322,7 @@
 </p:sld>
 </file>
 
-<file path=ppt/slides/slide19.xml><?xml version="1.0" encoding="utf-8"?>
+<file path=ppt/slides/slide17.xml><?xml version="1.0" encoding="utf-8"?>
 <p:sld xmlns:a="http://schemas.openxmlformats.org/drawingml/2006/main" xmlns:r="http://schemas.openxmlformats.org/officeDocument/2006/relationships" xmlns:p="http://schemas.openxmlformats.org/presentationml/2006/main">
   <p:cSld>
     <p:spTree>
@@ -11896,293 +10519,7 @@
 </p:sld>
 </file>
 
-<file path=ppt/slides/slide2.xml><?xml version="1.0" encoding="utf-8"?>
-<p:sld xmlns:a="http://schemas.openxmlformats.org/drawingml/2006/main" xmlns:r="http://schemas.openxmlformats.org/officeDocument/2006/relationships" xmlns:p="http://schemas.openxmlformats.org/presentationml/2006/main">
-  <p:cSld>
-    <p:spTree>
-      <p:nvGrpSpPr>
-        <p:cNvPr id="1" name=""/>
-        <p:cNvGrpSpPr/>
-        <p:nvPr/>
-      </p:nvGrpSpPr>
-      <p:grpSpPr>
-        <a:xfrm>
-          <a:off x="0" y="0"/>
-          <a:ext cx="0" cy="0"/>
-          <a:chOff x="0" y="0"/>
-          <a:chExt cx="0" cy="0"/>
-        </a:xfrm>
-      </p:grpSpPr>
-      <p:sp>
-        <p:nvSpPr>
-          <p:cNvPr id="2" name="Title 1"/>
-          <p:cNvSpPr>
-            <a:spLocks noGrp="1"/>
-          </p:cNvSpPr>
-          <p:nvPr>
-            <p:ph type="title"/>
-          </p:nvPr>
-        </p:nvSpPr>
-        <p:spPr>
-          <a:xfrm>
-            <a:off x="457200" y="304800"/>
-            <a:ext cx="8229600" cy="1143000"/>
-          </a:xfrm>
-        </p:spPr>
-        <p:txBody>
-          <a:bodyPr/>
-          <a:lstStyle/>
-          <a:p>
-            <a:r>
-              <a:rPr lang="en-US" dirty="0"/>
-              <a:t>Creating Variables</a:t>
-            </a:r>
-          </a:p>
-        </p:txBody>
-      </p:sp>
-      <p:sp>
-        <p:nvSpPr>
-          <p:cNvPr id="3" name="Content Placeholder 2"/>
-          <p:cNvSpPr>
-            <a:spLocks noGrp="1"/>
-          </p:cNvSpPr>
-          <p:nvPr>
-            <p:ph idx="1"/>
-          </p:nvPr>
-        </p:nvSpPr>
-        <p:spPr>
-          <a:xfrm>
-            <a:off x="457200" y="1722437"/>
-            <a:ext cx="8229600" cy="4525963"/>
-          </a:xfrm>
-        </p:spPr>
-        <p:txBody>
-          <a:bodyPr/>
-          <a:lstStyle/>
-          <a:p>
-            <a:r>
-              <a:rPr lang="en-US" dirty="0"/>
-              <a:t>Must be done within a </a:t>
-            </a:r>
-            <a:r>
-              <a:rPr lang="en-US" dirty="0">
-                <a:solidFill>
-                  <a:srgbClr val="FFFF00"/>
-                </a:solidFill>
-              </a:rPr>
-              <a:t>DATA</a:t>
-            </a:r>
-            <a:r>
-              <a:rPr lang="en-US" dirty="0"/>
-              <a:t> step</a:t>
-            </a:r>
-          </a:p>
-          <a:p>
-            <a:r>
-              <a:rPr lang="en-US" dirty="0"/>
-              <a:t>Numeric or Character</a:t>
-            </a:r>
-          </a:p>
-          <a:p>
-            <a:pPr marL="0" indent="0">
-              <a:buNone/>
-            </a:pPr>
-            <a:r>
-              <a:rPr lang="en-US" dirty="0">
-                <a:solidFill>
-                  <a:schemeClr val="tx2">
-                    <a:lumMod val="75000"/>
-                  </a:schemeClr>
-                </a:solidFill>
-              </a:rPr>
-              <a:t>	</a:t>
-            </a:r>
-            <a:r>
-              <a:rPr lang="en-US" dirty="0" err="1">
-                <a:solidFill>
-                  <a:schemeClr val="tx2">
-                    <a:lumMod val="75000"/>
-                  </a:schemeClr>
-                </a:solidFill>
-              </a:rPr>
-              <a:t>filenumber</a:t>
-            </a:r>
-            <a:r>
-              <a:rPr lang="en-US" dirty="0">
-                <a:solidFill>
-                  <a:schemeClr val="tx2">
-                    <a:lumMod val="75000"/>
-                  </a:schemeClr>
-                </a:solidFill>
-              </a:rPr>
-              <a:t> = 1; 	file = ‘file 1’;</a:t>
-            </a:r>
-          </a:p>
-          <a:p>
-            <a:pPr marL="457200" lvl="1" indent="0">
-              <a:buNone/>
-            </a:pPr>
-            <a:endParaRPr lang="en-US" dirty="0">
-              <a:solidFill>
-                <a:schemeClr val="tx2">
-                  <a:lumMod val="75000"/>
-                </a:schemeClr>
-              </a:solidFill>
-            </a:endParaRPr>
-          </a:p>
-        </p:txBody>
-      </p:sp>
-    </p:spTree>
-    <p:extLst>
-      <p:ext uri="{BB962C8B-B14F-4D97-AF65-F5344CB8AC3E}">
-        <p14:creationId xmlns:p14="http://schemas.microsoft.com/office/powerpoint/2010/main" val="3926184477"/>
-      </p:ext>
-    </p:extLst>
-  </p:cSld>
-  <p:clrMapOvr>
-    <a:masterClrMapping/>
-  </p:clrMapOvr>
-  <p:timing>
-    <p:tnLst>
-      <p:par>
-        <p:cTn id="1" dur="indefinite" restart="never" nodeType="tmRoot">
-          <p:childTnLst>
-            <p:seq concurrent="1" nextAc="seek">
-              <p:cTn id="2" dur="indefinite" nodeType="mainSeq">
-                <p:childTnLst>
-                  <p:par>
-                    <p:cTn id="3" fill="hold">
-                      <p:stCondLst>
-                        <p:cond delay="indefinite"/>
-                      </p:stCondLst>
-                      <p:childTnLst>
-                        <p:par>
-                          <p:cTn id="4" fill="hold">
-                            <p:stCondLst>
-                              <p:cond delay="0"/>
-                            </p:stCondLst>
-                            <p:childTnLst>
-                              <p:par>
-                                <p:cTn id="5" presetID="22" presetClass="entr" presetSubtype="8" fill="hold" grpId="0" nodeType="clickEffect">
-                                  <p:stCondLst>
-                                    <p:cond delay="0"/>
-                                  </p:stCondLst>
-                                  <p:childTnLst>
-                                    <p:set>
-                                      <p:cBhvr>
-                                        <p:cTn id="6" dur="1" fill="hold">
-                                          <p:stCondLst>
-                                            <p:cond delay="0"/>
-                                          </p:stCondLst>
-                                        </p:cTn>
-                                        <p:tgtEl>
-                                          <p:spTgt spid="3">
-                                            <p:txEl>
-                                              <p:pRg st="1" end="1"/>
-                                            </p:txEl>
-                                          </p:spTgt>
-                                        </p:tgtEl>
-                                        <p:attrNameLst>
-                                          <p:attrName>style.visibility</p:attrName>
-                                        </p:attrNameLst>
-                                      </p:cBhvr>
-                                      <p:to>
-                                        <p:strVal val="visible"/>
-                                      </p:to>
-                                    </p:set>
-                                    <p:animEffect transition="in" filter="wipe(left)">
-                                      <p:cBhvr>
-                                        <p:cTn id="7" dur="500"/>
-                                        <p:tgtEl>
-                                          <p:spTgt spid="3">
-                                            <p:txEl>
-                                              <p:pRg st="1" end="1"/>
-                                            </p:txEl>
-                                          </p:spTgt>
-                                        </p:tgtEl>
-                                      </p:cBhvr>
-                                    </p:animEffect>
-                                  </p:childTnLst>
-                                </p:cTn>
-                              </p:par>
-                              <p:par>
-                                <p:cTn id="8" presetID="22" presetClass="entr" presetSubtype="8" fill="hold" grpId="0" nodeType="withEffect">
-                                  <p:stCondLst>
-                                    <p:cond delay="0"/>
-                                  </p:stCondLst>
-                                  <p:childTnLst>
-                                    <p:set>
-                                      <p:cBhvr>
-                                        <p:cTn id="9" dur="1" fill="hold">
-                                          <p:stCondLst>
-                                            <p:cond delay="0"/>
-                                          </p:stCondLst>
-                                        </p:cTn>
-                                        <p:tgtEl>
-                                          <p:spTgt spid="3">
-                                            <p:txEl>
-                                              <p:pRg st="2" end="2"/>
-                                            </p:txEl>
-                                          </p:spTgt>
-                                        </p:tgtEl>
-                                        <p:attrNameLst>
-                                          <p:attrName>style.visibility</p:attrName>
-                                        </p:attrNameLst>
-                                      </p:cBhvr>
-                                      <p:to>
-                                        <p:strVal val="visible"/>
-                                      </p:to>
-                                    </p:set>
-                                    <p:animEffect transition="in" filter="wipe(left)">
-                                      <p:cBhvr>
-                                        <p:cTn id="10" dur="500"/>
-                                        <p:tgtEl>
-                                          <p:spTgt spid="3">
-                                            <p:txEl>
-                                              <p:pRg st="2" end="2"/>
-                                            </p:txEl>
-                                          </p:spTgt>
-                                        </p:tgtEl>
-                                      </p:cBhvr>
-                                    </p:animEffect>
-                                  </p:childTnLst>
-                                </p:cTn>
-                              </p:par>
-                            </p:childTnLst>
-                          </p:cTn>
-                        </p:par>
-                      </p:childTnLst>
-                    </p:cTn>
-                  </p:par>
-                </p:childTnLst>
-              </p:cTn>
-              <p:prevCondLst>
-                <p:cond evt="onPrev" delay="0">
-                  <p:tgtEl>
-                    <p:sldTgt/>
-                  </p:tgtEl>
-                </p:cond>
-              </p:prevCondLst>
-              <p:nextCondLst>
-                <p:cond evt="onNext" delay="0">
-                  <p:tgtEl>
-                    <p:sldTgt/>
-                  </p:tgtEl>
-                </p:cond>
-              </p:nextCondLst>
-            </p:seq>
-          </p:childTnLst>
-        </p:cTn>
-      </p:par>
-    </p:tnLst>
-    <p:bldLst>
-      <p:bldP spid="3" grpId="0" uiExpand="1" build="p"/>
-    </p:bldLst>
-  </p:timing>
-</p:sld>
-</file>
-
-<file path=ppt/slides/slide20.xml><?xml version="1.0" encoding="utf-8"?>
+<file path=ppt/slides/slide18.xml><?xml version="1.0" encoding="utf-8"?>
 <p:sld xmlns:a="http://schemas.openxmlformats.org/drawingml/2006/main" xmlns:r="http://schemas.openxmlformats.org/officeDocument/2006/relationships" xmlns:p="http://schemas.openxmlformats.org/presentationml/2006/main">
   <p:cSld>
     <p:spTree>
@@ -13021,7 +11358,7 @@
 </p:sld>
 </file>
 
-<file path=ppt/slides/slide21.xml><?xml version="1.0" encoding="utf-8"?>
+<file path=ppt/slides/slide19.xml><?xml version="1.0" encoding="utf-8"?>
 <p:sld xmlns:a="http://schemas.openxmlformats.org/drawingml/2006/main" xmlns:r="http://schemas.openxmlformats.org/officeDocument/2006/relationships" xmlns:p="http://schemas.openxmlformats.org/presentationml/2006/main">
   <p:cSld>
     <p:spTree>
@@ -13782,7 +12119,518 @@
 </p:sld>
 </file>
 
-<file path=ppt/slides/slide22.xml><?xml version="1.0" encoding="utf-8"?>
+<file path=ppt/slides/slide2.xml><?xml version="1.0" encoding="utf-8"?>
+<p:sld xmlns:a="http://schemas.openxmlformats.org/drawingml/2006/main" xmlns:r="http://schemas.openxmlformats.org/officeDocument/2006/relationships" xmlns:p="http://schemas.openxmlformats.org/presentationml/2006/main">
+  <p:cSld>
+    <p:spTree>
+      <p:nvGrpSpPr>
+        <p:cNvPr id="1" name=""/>
+        <p:cNvGrpSpPr/>
+        <p:nvPr/>
+      </p:nvGrpSpPr>
+      <p:grpSpPr>
+        <a:xfrm>
+          <a:off x="0" y="0"/>
+          <a:ext cx="0" cy="0"/>
+          <a:chOff x="0" y="0"/>
+          <a:chExt cx="0" cy="0"/>
+        </a:xfrm>
+      </p:grpSpPr>
+      <p:sp>
+        <p:nvSpPr>
+          <p:cNvPr id="2" name="Title 1"/>
+          <p:cNvSpPr>
+            <a:spLocks noGrp="1"/>
+          </p:cNvSpPr>
+          <p:nvPr>
+            <p:ph type="title"/>
+          </p:nvPr>
+        </p:nvSpPr>
+        <p:spPr>
+          <a:xfrm>
+            <a:off x="457200" y="304800"/>
+            <a:ext cx="8229600" cy="1143000"/>
+          </a:xfrm>
+        </p:spPr>
+        <p:txBody>
+          <a:bodyPr/>
+          <a:lstStyle/>
+          <a:p>
+            <a:r>
+              <a:rPr lang="en-US" dirty="0"/>
+              <a:t>Creating Variables</a:t>
+            </a:r>
+          </a:p>
+        </p:txBody>
+      </p:sp>
+      <p:sp>
+        <p:nvSpPr>
+          <p:cNvPr id="3" name="Content Placeholder 2"/>
+          <p:cNvSpPr>
+            <a:spLocks noGrp="1"/>
+          </p:cNvSpPr>
+          <p:nvPr>
+            <p:ph idx="1"/>
+          </p:nvPr>
+        </p:nvSpPr>
+        <p:spPr>
+          <a:xfrm>
+            <a:off x="457200" y="1722437"/>
+            <a:ext cx="8229600" cy="4525963"/>
+          </a:xfrm>
+        </p:spPr>
+        <p:txBody>
+          <a:bodyPr/>
+          <a:lstStyle/>
+          <a:p>
+            <a:r>
+              <a:rPr lang="en-US" dirty="0"/>
+              <a:t>Must be done within a </a:t>
+            </a:r>
+            <a:r>
+              <a:rPr lang="en-US" dirty="0">
+                <a:solidFill>
+                  <a:srgbClr val="FFFF00"/>
+                </a:solidFill>
+              </a:rPr>
+              <a:t>DATA</a:t>
+            </a:r>
+            <a:r>
+              <a:rPr lang="en-US" dirty="0"/>
+              <a:t> step</a:t>
+            </a:r>
+          </a:p>
+          <a:p>
+            <a:r>
+              <a:rPr lang="en-US" dirty="0"/>
+              <a:t>Numeric or Character</a:t>
+            </a:r>
+          </a:p>
+          <a:p>
+            <a:pPr marL="0" indent="0">
+              <a:buNone/>
+            </a:pPr>
+            <a:r>
+              <a:rPr lang="en-US" dirty="0">
+                <a:solidFill>
+                  <a:schemeClr val="tx2">
+                    <a:lumMod val="75000"/>
+                  </a:schemeClr>
+                </a:solidFill>
+              </a:rPr>
+              <a:t>	</a:t>
+            </a:r>
+            <a:r>
+              <a:rPr lang="en-US" dirty="0" err="1">
+                <a:solidFill>
+                  <a:schemeClr val="tx2">
+                    <a:lumMod val="75000"/>
+                  </a:schemeClr>
+                </a:solidFill>
+              </a:rPr>
+              <a:t>filenumber</a:t>
+            </a:r>
+            <a:r>
+              <a:rPr lang="en-US" dirty="0">
+                <a:solidFill>
+                  <a:schemeClr val="tx2">
+                    <a:lumMod val="75000"/>
+                  </a:schemeClr>
+                </a:solidFill>
+              </a:rPr>
+              <a:t> = 1; 	file = ‘file 1’;</a:t>
+            </a:r>
+          </a:p>
+          <a:p>
+            <a:r>
+              <a:rPr lang="en-US" dirty="0"/>
+              <a:t>Arithmetic operators (+, -, *, /, **)</a:t>
+            </a:r>
+          </a:p>
+          <a:p>
+            <a:pPr marL="0" indent="0">
+              <a:buNone/>
+            </a:pPr>
+            <a:r>
+              <a:rPr lang="en-US" dirty="0">
+                <a:solidFill>
+                  <a:schemeClr val="tx2">
+                    <a:lumMod val="75000"/>
+                  </a:schemeClr>
+                </a:solidFill>
+              </a:rPr>
+              <a:t>	increase = posttest – pretest;</a:t>
+            </a:r>
+          </a:p>
+          <a:p>
+            <a:pPr marL="0" indent="0">
+              <a:buNone/>
+            </a:pPr>
+            <a:r>
+              <a:rPr lang="en-US" dirty="0"/>
+              <a:t>	missing data outputs missing result</a:t>
+            </a:r>
+          </a:p>
+          <a:p>
+            <a:r>
+              <a:rPr lang="en-US" dirty="0">
+                <a:solidFill>
+                  <a:srgbClr val="FFFF00"/>
+                </a:solidFill>
+              </a:rPr>
+              <a:t>SUM(Var1, Var2, etc.)</a:t>
+            </a:r>
+            <a:r>
+              <a:rPr lang="en-US" dirty="0"/>
+              <a:t>, among others</a:t>
+            </a:r>
+          </a:p>
+          <a:p>
+            <a:pPr lvl="1"/>
+            <a:r>
+              <a:rPr lang="en-US" dirty="0"/>
+              <a:t>Adds variables, but excludes missing </a:t>
+            </a:r>
+          </a:p>
+          <a:p>
+            <a:pPr marL="457200" lvl="1" indent="0">
+              <a:buNone/>
+            </a:pPr>
+            <a:endParaRPr lang="en-US" dirty="0">
+              <a:solidFill>
+                <a:schemeClr val="tx2">
+                  <a:lumMod val="75000"/>
+                </a:schemeClr>
+              </a:solidFill>
+            </a:endParaRPr>
+          </a:p>
+        </p:txBody>
+      </p:sp>
+    </p:spTree>
+    <p:extLst>
+      <p:ext uri="{BB962C8B-B14F-4D97-AF65-F5344CB8AC3E}">
+        <p14:creationId xmlns:p14="http://schemas.microsoft.com/office/powerpoint/2010/main" val="3232417238"/>
+      </p:ext>
+    </p:extLst>
+  </p:cSld>
+  <p:clrMapOvr>
+    <a:masterClrMapping/>
+  </p:clrMapOvr>
+  <p:timing>
+    <p:tnLst>
+      <p:par>
+        <p:cTn id="1" dur="indefinite" restart="never" nodeType="tmRoot">
+          <p:childTnLst>
+            <p:seq concurrent="1" nextAc="seek">
+              <p:cTn id="2" dur="indefinite" nodeType="mainSeq">
+                <p:childTnLst>
+                  <p:par>
+                    <p:cTn id="3" fill="hold">
+                      <p:stCondLst>
+                        <p:cond delay="indefinite"/>
+                      </p:stCondLst>
+                      <p:childTnLst>
+                        <p:par>
+                          <p:cTn id="4" fill="hold">
+                            <p:stCondLst>
+                              <p:cond delay="0"/>
+                            </p:stCondLst>
+                            <p:childTnLst>
+                              <p:par>
+                                <p:cTn id="5" presetID="22" presetClass="entr" presetSubtype="8" fill="hold" grpId="0" nodeType="clickEffect">
+                                  <p:stCondLst>
+                                    <p:cond delay="0"/>
+                                  </p:stCondLst>
+                                  <p:childTnLst>
+                                    <p:set>
+                                      <p:cBhvr>
+                                        <p:cTn id="6" dur="1" fill="hold">
+                                          <p:stCondLst>
+                                            <p:cond delay="0"/>
+                                          </p:stCondLst>
+                                        </p:cTn>
+                                        <p:tgtEl>
+                                          <p:spTgt spid="3">
+                                            <p:txEl>
+                                              <p:pRg st="3" end="3"/>
+                                            </p:txEl>
+                                          </p:spTgt>
+                                        </p:tgtEl>
+                                        <p:attrNameLst>
+                                          <p:attrName>style.visibility</p:attrName>
+                                        </p:attrNameLst>
+                                      </p:cBhvr>
+                                      <p:to>
+                                        <p:strVal val="visible"/>
+                                      </p:to>
+                                    </p:set>
+                                    <p:animEffect transition="in" filter="wipe(left)">
+                                      <p:cBhvr>
+                                        <p:cTn id="7" dur="500"/>
+                                        <p:tgtEl>
+                                          <p:spTgt spid="3">
+                                            <p:txEl>
+                                              <p:pRg st="3" end="3"/>
+                                            </p:txEl>
+                                          </p:spTgt>
+                                        </p:tgtEl>
+                                      </p:cBhvr>
+                                    </p:animEffect>
+                                  </p:childTnLst>
+                                </p:cTn>
+                              </p:par>
+                            </p:childTnLst>
+                          </p:cTn>
+                        </p:par>
+                        <p:par>
+                          <p:cTn id="8" fill="hold">
+                            <p:stCondLst>
+                              <p:cond delay="500"/>
+                            </p:stCondLst>
+                            <p:childTnLst>
+                              <p:par>
+                                <p:cTn id="9" presetID="22" presetClass="entr" presetSubtype="8" fill="hold" grpId="0" nodeType="afterEffect">
+                                  <p:stCondLst>
+                                    <p:cond delay="0"/>
+                                  </p:stCondLst>
+                                  <p:childTnLst>
+                                    <p:set>
+                                      <p:cBhvr>
+                                        <p:cTn id="10" dur="1" fill="hold">
+                                          <p:stCondLst>
+                                            <p:cond delay="0"/>
+                                          </p:stCondLst>
+                                        </p:cTn>
+                                        <p:tgtEl>
+                                          <p:spTgt spid="3">
+                                            <p:txEl>
+                                              <p:pRg st="4" end="4"/>
+                                            </p:txEl>
+                                          </p:spTgt>
+                                        </p:tgtEl>
+                                        <p:attrNameLst>
+                                          <p:attrName>style.visibility</p:attrName>
+                                        </p:attrNameLst>
+                                      </p:cBhvr>
+                                      <p:to>
+                                        <p:strVal val="visible"/>
+                                      </p:to>
+                                    </p:set>
+                                    <p:animEffect transition="in" filter="wipe(left)">
+                                      <p:cBhvr>
+                                        <p:cTn id="11" dur="500"/>
+                                        <p:tgtEl>
+                                          <p:spTgt spid="3">
+                                            <p:txEl>
+                                              <p:pRg st="4" end="4"/>
+                                            </p:txEl>
+                                          </p:spTgt>
+                                        </p:tgtEl>
+                                      </p:cBhvr>
+                                    </p:animEffect>
+                                  </p:childTnLst>
+                                </p:cTn>
+                              </p:par>
+                            </p:childTnLst>
+                          </p:cTn>
+                        </p:par>
+                      </p:childTnLst>
+                    </p:cTn>
+                  </p:par>
+                  <p:par>
+                    <p:cTn id="12" fill="hold">
+                      <p:stCondLst>
+                        <p:cond delay="indefinite"/>
+                      </p:stCondLst>
+                      <p:childTnLst>
+                        <p:par>
+                          <p:cTn id="13" fill="hold">
+                            <p:stCondLst>
+                              <p:cond delay="0"/>
+                            </p:stCondLst>
+                            <p:childTnLst>
+                              <p:par>
+                                <p:cTn id="14" presetID="22" presetClass="entr" presetSubtype="8" fill="hold" grpId="0" nodeType="clickEffect">
+                                  <p:stCondLst>
+                                    <p:cond delay="0"/>
+                                  </p:stCondLst>
+                                  <p:childTnLst>
+                                    <p:set>
+                                      <p:cBhvr>
+                                        <p:cTn id="15" dur="1" fill="hold">
+                                          <p:stCondLst>
+                                            <p:cond delay="0"/>
+                                          </p:stCondLst>
+                                        </p:cTn>
+                                        <p:tgtEl>
+                                          <p:spTgt spid="3">
+                                            <p:txEl>
+                                              <p:pRg st="5" end="5"/>
+                                            </p:txEl>
+                                          </p:spTgt>
+                                        </p:tgtEl>
+                                        <p:attrNameLst>
+                                          <p:attrName>style.visibility</p:attrName>
+                                        </p:attrNameLst>
+                                      </p:cBhvr>
+                                      <p:to>
+                                        <p:strVal val="visible"/>
+                                      </p:to>
+                                    </p:set>
+                                    <p:animEffect transition="in" filter="wipe(left)">
+                                      <p:cBhvr>
+                                        <p:cTn id="16" dur="500"/>
+                                        <p:tgtEl>
+                                          <p:spTgt spid="3">
+                                            <p:txEl>
+                                              <p:pRg st="5" end="5"/>
+                                            </p:txEl>
+                                          </p:spTgt>
+                                        </p:tgtEl>
+                                      </p:cBhvr>
+                                    </p:animEffect>
+                                  </p:childTnLst>
+                                </p:cTn>
+                              </p:par>
+                            </p:childTnLst>
+                          </p:cTn>
+                        </p:par>
+                      </p:childTnLst>
+                    </p:cTn>
+                  </p:par>
+                  <p:par>
+                    <p:cTn id="17" fill="hold">
+                      <p:stCondLst>
+                        <p:cond delay="indefinite"/>
+                      </p:stCondLst>
+                      <p:childTnLst>
+                        <p:par>
+                          <p:cTn id="18" fill="hold">
+                            <p:stCondLst>
+                              <p:cond delay="0"/>
+                            </p:stCondLst>
+                            <p:childTnLst>
+                              <p:par>
+                                <p:cTn id="19" presetID="22" presetClass="entr" presetSubtype="8" fill="hold" grpId="0" nodeType="clickEffect">
+                                  <p:stCondLst>
+                                    <p:cond delay="0"/>
+                                  </p:stCondLst>
+                                  <p:childTnLst>
+                                    <p:set>
+                                      <p:cBhvr>
+                                        <p:cTn id="20" dur="1" fill="hold">
+                                          <p:stCondLst>
+                                            <p:cond delay="0"/>
+                                          </p:stCondLst>
+                                        </p:cTn>
+                                        <p:tgtEl>
+                                          <p:spTgt spid="3">
+                                            <p:txEl>
+                                              <p:pRg st="6" end="6"/>
+                                            </p:txEl>
+                                          </p:spTgt>
+                                        </p:tgtEl>
+                                        <p:attrNameLst>
+                                          <p:attrName>style.visibility</p:attrName>
+                                        </p:attrNameLst>
+                                      </p:cBhvr>
+                                      <p:to>
+                                        <p:strVal val="visible"/>
+                                      </p:to>
+                                    </p:set>
+                                    <p:animEffect transition="in" filter="wipe(left)">
+                                      <p:cBhvr>
+                                        <p:cTn id="21" dur="500"/>
+                                        <p:tgtEl>
+                                          <p:spTgt spid="3">
+                                            <p:txEl>
+                                              <p:pRg st="6" end="6"/>
+                                            </p:txEl>
+                                          </p:spTgt>
+                                        </p:tgtEl>
+                                      </p:cBhvr>
+                                    </p:animEffect>
+                                  </p:childTnLst>
+                                </p:cTn>
+                              </p:par>
+                              <p:par>
+                                <p:cTn id="22" presetID="22" presetClass="entr" presetSubtype="8" fill="hold" grpId="0" nodeType="withEffect">
+                                  <p:stCondLst>
+                                    <p:cond delay="0"/>
+                                  </p:stCondLst>
+                                  <p:childTnLst>
+                                    <p:set>
+                                      <p:cBhvr>
+                                        <p:cTn id="23" dur="1" fill="hold">
+                                          <p:stCondLst>
+                                            <p:cond delay="0"/>
+                                          </p:stCondLst>
+                                        </p:cTn>
+                                        <p:tgtEl>
+                                          <p:spTgt spid="3">
+                                            <p:txEl>
+                                              <p:pRg st="7" end="7"/>
+                                            </p:txEl>
+                                          </p:spTgt>
+                                        </p:tgtEl>
+                                        <p:attrNameLst>
+                                          <p:attrName>style.visibility</p:attrName>
+                                        </p:attrNameLst>
+                                      </p:cBhvr>
+                                      <p:to>
+                                        <p:strVal val="visible"/>
+                                      </p:to>
+                                    </p:set>
+                                    <p:animEffect transition="in" filter="wipe(left)">
+                                      <p:cBhvr>
+                                        <p:cTn id="24" dur="500"/>
+                                        <p:tgtEl>
+                                          <p:spTgt spid="3">
+                                            <p:txEl>
+                                              <p:pRg st="7" end="7"/>
+                                            </p:txEl>
+                                          </p:spTgt>
+                                        </p:tgtEl>
+                                      </p:cBhvr>
+                                    </p:animEffect>
+                                  </p:childTnLst>
+                                </p:cTn>
+                              </p:par>
+                            </p:childTnLst>
+                          </p:cTn>
+                        </p:par>
+                      </p:childTnLst>
+                    </p:cTn>
+                  </p:par>
+                </p:childTnLst>
+              </p:cTn>
+              <p:prevCondLst>
+                <p:cond evt="onPrev" delay="0">
+                  <p:tgtEl>
+                    <p:sldTgt/>
+                  </p:tgtEl>
+                </p:cond>
+              </p:prevCondLst>
+              <p:nextCondLst>
+                <p:cond evt="onNext" delay="0">
+                  <p:tgtEl>
+                    <p:sldTgt/>
+                  </p:tgtEl>
+                </p:cond>
+              </p:nextCondLst>
+            </p:seq>
+          </p:childTnLst>
+        </p:cTn>
+      </p:par>
+    </p:tnLst>
+    <p:bldLst>
+      <p:bldP spid="3" grpId="0" uiExpand="1" build="p"/>
+    </p:bldLst>
+  </p:timing>
+</p:sld>
+</file>
+
+<file path=ppt/slides/slide20.xml><?xml version="1.0" encoding="utf-8"?>
 <p:sld xmlns:a="http://schemas.openxmlformats.org/drawingml/2006/main" xmlns:r="http://schemas.openxmlformats.org/officeDocument/2006/relationships" xmlns:p="http://schemas.openxmlformats.org/presentationml/2006/main">
   <p:cSld>
     <p:spTree>
@@ -15261,7 +14109,7 @@
 </p:sld>
 </file>
 
-<file path=ppt/slides/slide23.xml><?xml version="1.0" encoding="utf-8"?>
+<file path=ppt/slides/slide21.xml><?xml version="1.0" encoding="utf-8"?>
 <p:sld xmlns:a="http://schemas.openxmlformats.org/drawingml/2006/main" xmlns:r="http://schemas.openxmlformats.org/officeDocument/2006/relationships" xmlns:p="http://schemas.openxmlformats.org/presentationml/2006/main">
   <p:cSld>
     <p:spTree>
@@ -15347,7 +14195,7 @@
 </p:sld>
 </file>
 
-<file path=ppt/slides/slide24.xml><?xml version="1.0" encoding="utf-8"?>
+<file path=ppt/slides/slide22.xml><?xml version="1.0" encoding="utf-8"?>
 <p:sld xmlns:a="http://schemas.openxmlformats.org/drawingml/2006/main" xmlns:r="http://schemas.openxmlformats.org/officeDocument/2006/relationships" xmlns:p="http://schemas.openxmlformats.org/presentationml/2006/main">
   <p:cSld>
     <p:spTree>
@@ -15474,7 +14322,7 @@
 </p:sld>
 </file>
 
-<file path=ppt/slides/slide25.xml><?xml version="1.0" encoding="utf-8"?>
+<file path=ppt/slides/slide23.xml><?xml version="1.0" encoding="utf-8"?>
 <p:sld xmlns:a="http://schemas.openxmlformats.org/drawingml/2006/main" xmlns:r="http://schemas.openxmlformats.org/officeDocument/2006/relationships" xmlns:p="http://schemas.openxmlformats.org/presentationml/2006/main">
   <p:cSld>
     <p:spTree>
@@ -15782,7 +14630,7 @@
 </p:sld>
 </file>
 
-<file path=ppt/slides/slide26.xml><?xml version="1.0" encoding="utf-8"?>
+<file path=ppt/slides/slide24.xml><?xml version="1.0" encoding="utf-8"?>
 <p:sld xmlns:a="http://schemas.openxmlformats.org/drawingml/2006/main" xmlns:r="http://schemas.openxmlformats.org/officeDocument/2006/relationships" xmlns:p="http://schemas.openxmlformats.org/presentationml/2006/main">
   <p:cSld>
     <p:spTree>
@@ -15956,7 +14804,7 @@
 </p:sld>
 </file>
 
-<file path=ppt/slides/slide27.xml><?xml version="1.0" encoding="utf-8"?>
+<file path=ppt/slides/slide25.xml><?xml version="1.0" encoding="utf-8"?>
 <p:sld xmlns:a="http://schemas.openxmlformats.org/drawingml/2006/main" xmlns:r="http://schemas.openxmlformats.org/officeDocument/2006/relationships" xmlns:p="http://schemas.openxmlformats.org/presentationml/2006/main">
   <p:cSld>
     <p:spTree>
@@ -16383,680 +15231,6 @@
 </file>
 
 <file path=ppt/slides/slide3.xml><?xml version="1.0" encoding="utf-8"?>
-<p:sld xmlns:a="http://schemas.openxmlformats.org/drawingml/2006/main" xmlns:r="http://schemas.openxmlformats.org/officeDocument/2006/relationships" xmlns:p="http://schemas.openxmlformats.org/presentationml/2006/main">
-  <p:cSld>
-    <p:spTree>
-      <p:nvGrpSpPr>
-        <p:cNvPr id="1" name=""/>
-        <p:cNvGrpSpPr/>
-        <p:nvPr/>
-      </p:nvGrpSpPr>
-      <p:grpSpPr>
-        <a:xfrm>
-          <a:off x="0" y="0"/>
-          <a:ext cx="0" cy="0"/>
-          <a:chOff x="0" y="0"/>
-          <a:chExt cx="0" cy="0"/>
-        </a:xfrm>
-      </p:grpSpPr>
-      <p:sp>
-        <p:nvSpPr>
-          <p:cNvPr id="2" name="Title 1"/>
-          <p:cNvSpPr>
-            <a:spLocks noGrp="1"/>
-          </p:cNvSpPr>
-          <p:nvPr>
-            <p:ph type="title"/>
-          </p:nvPr>
-        </p:nvSpPr>
-        <p:spPr/>
-        <p:txBody>
-          <a:bodyPr/>
-          <a:lstStyle/>
-          <a:p>
-            <a:r>
-              <a:rPr lang="en-US" dirty="0"/>
-              <a:t>Practice Problem (together)</a:t>
-            </a:r>
-          </a:p>
-        </p:txBody>
-      </p:sp>
-      <p:sp>
-        <p:nvSpPr>
-          <p:cNvPr id="3" name="Content Placeholder 2"/>
-          <p:cNvSpPr>
-            <a:spLocks noGrp="1"/>
-          </p:cNvSpPr>
-          <p:nvPr>
-            <p:ph idx="1"/>
-          </p:nvPr>
-        </p:nvSpPr>
-        <p:spPr>
-          <a:xfrm>
-            <a:off x="457200" y="1600200"/>
-            <a:ext cx="8458200" cy="4983162"/>
-          </a:xfrm>
-        </p:spPr>
-        <p:txBody>
-          <a:bodyPr/>
-          <a:lstStyle/>
-          <a:p>
-            <a:pPr marL="166688" lvl="1" indent="0">
-              <a:buNone/>
-            </a:pPr>
-            <a:r>
-              <a:rPr lang="en-US" dirty="0"/>
-              <a:t>From SAS Practice Problem 1-3…</a:t>
-            </a:r>
-          </a:p>
-          <a:p>
-            <a:pPr marL="166688" lvl="1" indent="0">
-              <a:buNone/>
-            </a:pPr>
-            <a:r>
-              <a:rPr lang="en-US" dirty="0"/>
-              <a:t>Instead of reading in a dataset called </a:t>
-            </a:r>
-            <a:r>
-              <a:rPr lang="en-US" i="1" dirty="0"/>
-              <a:t>school</a:t>
-            </a:r>
-            <a:r>
-              <a:rPr lang="en-US" dirty="0"/>
-              <a:t>, </a:t>
-            </a:r>
-          </a:p>
-          <a:p>
-            <a:pPr marL="681038" lvl="1" indent="-514350">
-              <a:buFont typeface="+mj-lt"/>
-              <a:buAutoNum type="arabicPeriod"/>
-            </a:pPr>
-            <a:r>
-              <a:rPr lang="en-US" dirty="0"/>
-              <a:t>create </a:t>
-            </a:r>
-            <a:r>
-              <a:rPr lang="en-US" i="1" dirty="0" err="1"/>
-              <a:t>schoolA</a:t>
-            </a:r>
-            <a:r>
-              <a:rPr lang="en-US" dirty="0"/>
-              <a:t> which reads in the five names of the kids in school A </a:t>
-            </a:r>
-          </a:p>
-          <a:p>
-            <a:pPr marL="681038" lvl="1" indent="-514350">
-              <a:buFont typeface="+mj-lt"/>
-              <a:buAutoNum type="arabicPeriod"/>
-            </a:pPr>
-            <a:r>
-              <a:rPr lang="en-US" dirty="0"/>
-              <a:t>Create </a:t>
-            </a:r>
-            <a:r>
-              <a:rPr lang="en-US" i="1" dirty="0" err="1"/>
-              <a:t>schoolB</a:t>
-            </a:r>
-            <a:r>
-              <a:rPr lang="en-US" dirty="0"/>
-              <a:t> which reads in the three names of the kids in school B</a:t>
-            </a:r>
-          </a:p>
-          <a:p>
-            <a:pPr marL="681038" lvl="1" indent="-514350">
-              <a:buFont typeface="+mj-lt"/>
-              <a:buAutoNum type="arabicPeriod"/>
-            </a:pPr>
-            <a:r>
-              <a:rPr lang="en-US" dirty="0"/>
-              <a:t>For each one, add a variable that identifies the school</a:t>
-            </a:r>
-          </a:p>
-          <a:p>
-            <a:pPr marL="681038" lvl="1" indent="-514350">
-              <a:buFont typeface="+mj-lt"/>
-              <a:buAutoNum type="arabicPeriod"/>
-            </a:pPr>
-            <a:r>
-              <a:rPr lang="en-US" dirty="0"/>
-              <a:t>combine these datasets together to recreate the original </a:t>
-            </a:r>
-            <a:r>
-              <a:rPr lang="en-US" i="1" dirty="0"/>
-              <a:t>school</a:t>
-            </a:r>
-            <a:r>
-              <a:rPr lang="en-US" dirty="0"/>
-              <a:t> dataset.</a:t>
-            </a:r>
-          </a:p>
-        </p:txBody>
-      </p:sp>
-    </p:spTree>
-    <p:extLst>
-      <p:ext uri="{BB962C8B-B14F-4D97-AF65-F5344CB8AC3E}">
-        <p14:creationId xmlns:p14="http://schemas.microsoft.com/office/powerpoint/2010/main" val="4001161195"/>
-      </p:ext>
-    </p:extLst>
-  </p:cSld>
-  <p:clrMapOvr>
-    <a:masterClrMapping/>
-  </p:clrMapOvr>
-</p:sld>
-</file>
-
-<file path=ppt/slides/slide4.xml><?xml version="1.0" encoding="utf-8"?>
-<p:sld xmlns:a="http://schemas.openxmlformats.org/drawingml/2006/main" xmlns:r="http://schemas.openxmlformats.org/officeDocument/2006/relationships" xmlns:p="http://schemas.openxmlformats.org/presentationml/2006/main">
-  <p:cSld>
-    <p:spTree>
-      <p:nvGrpSpPr>
-        <p:cNvPr id="1" name=""/>
-        <p:cNvGrpSpPr/>
-        <p:nvPr/>
-      </p:nvGrpSpPr>
-      <p:grpSpPr>
-        <a:xfrm>
-          <a:off x="0" y="0"/>
-          <a:ext cx="0" cy="0"/>
-          <a:chOff x="0" y="0"/>
-          <a:chExt cx="0" cy="0"/>
-        </a:xfrm>
-      </p:grpSpPr>
-      <p:sp>
-        <p:nvSpPr>
-          <p:cNvPr id="2" name="Title 1"/>
-          <p:cNvSpPr>
-            <a:spLocks noGrp="1"/>
-          </p:cNvSpPr>
-          <p:nvPr>
-            <p:ph type="title"/>
-          </p:nvPr>
-        </p:nvSpPr>
-        <p:spPr>
-          <a:xfrm>
-            <a:off x="457200" y="304800"/>
-            <a:ext cx="8229600" cy="1143000"/>
-          </a:xfrm>
-        </p:spPr>
-        <p:txBody>
-          <a:bodyPr/>
-          <a:lstStyle/>
-          <a:p>
-            <a:r>
-              <a:rPr lang="en-US" dirty="0"/>
-              <a:t>Creating Variables</a:t>
-            </a:r>
-          </a:p>
-        </p:txBody>
-      </p:sp>
-      <p:sp>
-        <p:nvSpPr>
-          <p:cNvPr id="3" name="Content Placeholder 2"/>
-          <p:cNvSpPr>
-            <a:spLocks noGrp="1"/>
-          </p:cNvSpPr>
-          <p:nvPr>
-            <p:ph idx="1"/>
-          </p:nvPr>
-        </p:nvSpPr>
-        <p:spPr>
-          <a:xfrm>
-            <a:off x="457200" y="1722437"/>
-            <a:ext cx="8229600" cy="4525963"/>
-          </a:xfrm>
-        </p:spPr>
-        <p:txBody>
-          <a:bodyPr/>
-          <a:lstStyle/>
-          <a:p>
-            <a:r>
-              <a:rPr lang="en-US" dirty="0"/>
-              <a:t>Must be done within a </a:t>
-            </a:r>
-            <a:r>
-              <a:rPr lang="en-US" dirty="0">
-                <a:solidFill>
-                  <a:srgbClr val="FFFF00"/>
-                </a:solidFill>
-              </a:rPr>
-              <a:t>DATA</a:t>
-            </a:r>
-            <a:r>
-              <a:rPr lang="en-US" dirty="0"/>
-              <a:t> step</a:t>
-            </a:r>
-          </a:p>
-          <a:p>
-            <a:r>
-              <a:rPr lang="en-US" dirty="0"/>
-              <a:t>Numeric or Character</a:t>
-            </a:r>
-          </a:p>
-          <a:p>
-            <a:pPr marL="0" indent="0">
-              <a:buNone/>
-            </a:pPr>
-            <a:r>
-              <a:rPr lang="en-US" dirty="0">
-                <a:solidFill>
-                  <a:schemeClr val="tx2">
-                    <a:lumMod val="75000"/>
-                  </a:schemeClr>
-                </a:solidFill>
-              </a:rPr>
-              <a:t>	</a:t>
-            </a:r>
-            <a:r>
-              <a:rPr lang="en-US" dirty="0" err="1">
-                <a:solidFill>
-                  <a:schemeClr val="tx2">
-                    <a:lumMod val="75000"/>
-                  </a:schemeClr>
-                </a:solidFill>
-              </a:rPr>
-              <a:t>filenumber</a:t>
-            </a:r>
-            <a:r>
-              <a:rPr lang="en-US" dirty="0">
-                <a:solidFill>
-                  <a:schemeClr val="tx2">
-                    <a:lumMod val="75000"/>
-                  </a:schemeClr>
-                </a:solidFill>
-              </a:rPr>
-              <a:t> = 1; 	file = ‘file 1’;</a:t>
-            </a:r>
-          </a:p>
-          <a:p>
-            <a:r>
-              <a:rPr lang="en-US" dirty="0"/>
-              <a:t>Arithmetic operators (+, -, *, /, **)</a:t>
-            </a:r>
-          </a:p>
-          <a:p>
-            <a:pPr marL="0" indent="0">
-              <a:buNone/>
-            </a:pPr>
-            <a:r>
-              <a:rPr lang="en-US" dirty="0">
-                <a:solidFill>
-                  <a:schemeClr val="tx2">
-                    <a:lumMod val="75000"/>
-                  </a:schemeClr>
-                </a:solidFill>
-              </a:rPr>
-              <a:t>	increase = posttest – pretest;</a:t>
-            </a:r>
-          </a:p>
-          <a:p>
-            <a:pPr marL="0" indent="0">
-              <a:buNone/>
-            </a:pPr>
-            <a:r>
-              <a:rPr lang="en-US" dirty="0"/>
-              <a:t>	missing data outputs missing result</a:t>
-            </a:r>
-          </a:p>
-          <a:p>
-            <a:r>
-              <a:rPr lang="en-US" dirty="0">
-                <a:solidFill>
-                  <a:srgbClr val="FFFF00"/>
-                </a:solidFill>
-              </a:rPr>
-              <a:t>SUM(Var1, Var2, etc.)</a:t>
-            </a:r>
-            <a:r>
-              <a:rPr lang="en-US" dirty="0"/>
-              <a:t>, among others</a:t>
-            </a:r>
-          </a:p>
-          <a:p>
-            <a:pPr lvl="1"/>
-            <a:r>
-              <a:rPr lang="en-US" dirty="0"/>
-              <a:t>Adds variables, but excludes missing </a:t>
-            </a:r>
-          </a:p>
-          <a:p>
-            <a:pPr marL="457200" lvl="1" indent="0">
-              <a:buNone/>
-            </a:pPr>
-            <a:endParaRPr lang="en-US" dirty="0">
-              <a:solidFill>
-                <a:schemeClr val="tx2">
-                  <a:lumMod val="75000"/>
-                </a:schemeClr>
-              </a:solidFill>
-            </a:endParaRPr>
-          </a:p>
-        </p:txBody>
-      </p:sp>
-    </p:spTree>
-    <p:extLst>
-      <p:ext uri="{BB962C8B-B14F-4D97-AF65-F5344CB8AC3E}">
-        <p14:creationId xmlns:p14="http://schemas.microsoft.com/office/powerpoint/2010/main" val="3232417238"/>
-      </p:ext>
-    </p:extLst>
-  </p:cSld>
-  <p:clrMapOvr>
-    <a:masterClrMapping/>
-  </p:clrMapOvr>
-  <p:timing>
-    <p:tnLst>
-      <p:par>
-        <p:cTn id="1" dur="indefinite" restart="never" nodeType="tmRoot">
-          <p:childTnLst>
-            <p:seq concurrent="1" nextAc="seek">
-              <p:cTn id="2" dur="indefinite" nodeType="mainSeq">
-                <p:childTnLst>
-                  <p:par>
-                    <p:cTn id="3" fill="hold">
-                      <p:stCondLst>
-                        <p:cond delay="indefinite"/>
-                      </p:stCondLst>
-                      <p:childTnLst>
-                        <p:par>
-                          <p:cTn id="4" fill="hold">
-                            <p:stCondLst>
-                              <p:cond delay="0"/>
-                            </p:stCondLst>
-                            <p:childTnLst>
-                              <p:par>
-                                <p:cTn id="5" presetID="22" presetClass="entr" presetSubtype="8" fill="hold" grpId="0" nodeType="clickEffect">
-                                  <p:stCondLst>
-                                    <p:cond delay="0"/>
-                                  </p:stCondLst>
-                                  <p:childTnLst>
-                                    <p:set>
-                                      <p:cBhvr>
-                                        <p:cTn id="6" dur="1" fill="hold">
-                                          <p:stCondLst>
-                                            <p:cond delay="0"/>
-                                          </p:stCondLst>
-                                        </p:cTn>
-                                        <p:tgtEl>
-                                          <p:spTgt spid="3">
-                                            <p:txEl>
-                                              <p:pRg st="3" end="3"/>
-                                            </p:txEl>
-                                          </p:spTgt>
-                                        </p:tgtEl>
-                                        <p:attrNameLst>
-                                          <p:attrName>style.visibility</p:attrName>
-                                        </p:attrNameLst>
-                                      </p:cBhvr>
-                                      <p:to>
-                                        <p:strVal val="visible"/>
-                                      </p:to>
-                                    </p:set>
-                                    <p:animEffect transition="in" filter="wipe(left)">
-                                      <p:cBhvr>
-                                        <p:cTn id="7" dur="500"/>
-                                        <p:tgtEl>
-                                          <p:spTgt spid="3">
-                                            <p:txEl>
-                                              <p:pRg st="3" end="3"/>
-                                            </p:txEl>
-                                          </p:spTgt>
-                                        </p:tgtEl>
-                                      </p:cBhvr>
-                                    </p:animEffect>
-                                  </p:childTnLst>
-                                </p:cTn>
-                              </p:par>
-                            </p:childTnLst>
-                          </p:cTn>
-                        </p:par>
-                        <p:par>
-                          <p:cTn id="8" fill="hold">
-                            <p:stCondLst>
-                              <p:cond delay="500"/>
-                            </p:stCondLst>
-                            <p:childTnLst>
-                              <p:par>
-                                <p:cTn id="9" presetID="22" presetClass="entr" presetSubtype="8" fill="hold" grpId="0" nodeType="afterEffect">
-                                  <p:stCondLst>
-                                    <p:cond delay="0"/>
-                                  </p:stCondLst>
-                                  <p:childTnLst>
-                                    <p:set>
-                                      <p:cBhvr>
-                                        <p:cTn id="10" dur="1" fill="hold">
-                                          <p:stCondLst>
-                                            <p:cond delay="0"/>
-                                          </p:stCondLst>
-                                        </p:cTn>
-                                        <p:tgtEl>
-                                          <p:spTgt spid="3">
-                                            <p:txEl>
-                                              <p:pRg st="4" end="4"/>
-                                            </p:txEl>
-                                          </p:spTgt>
-                                        </p:tgtEl>
-                                        <p:attrNameLst>
-                                          <p:attrName>style.visibility</p:attrName>
-                                        </p:attrNameLst>
-                                      </p:cBhvr>
-                                      <p:to>
-                                        <p:strVal val="visible"/>
-                                      </p:to>
-                                    </p:set>
-                                    <p:animEffect transition="in" filter="wipe(left)">
-                                      <p:cBhvr>
-                                        <p:cTn id="11" dur="500"/>
-                                        <p:tgtEl>
-                                          <p:spTgt spid="3">
-                                            <p:txEl>
-                                              <p:pRg st="4" end="4"/>
-                                            </p:txEl>
-                                          </p:spTgt>
-                                        </p:tgtEl>
-                                      </p:cBhvr>
-                                    </p:animEffect>
-                                  </p:childTnLst>
-                                </p:cTn>
-                              </p:par>
-                            </p:childTnLst>
-                          </p:cTn>
-                        </p:par>
-                      </p:childTnLst>
-                    </p:cTn>
-                  </p:par>
-                  <p:par>
-                    <p:cTn id="12" fill="hold">
-                      <p:stCondLst>
-                        <p:cond delay="indefinite"/>
-                      </p:stCondLst>
-                      <p:childTnLst>
-                        <p:par>
-                          <p:cTn id="13" fill="hold">
-                            <p:stCondLst>
-                              <p:cond delay="0"/>
-                            </p:stCondLst>
-                            <p:childTnLst>
-                              <p:par>
-                                <p:cTn id="14" presetID="22" presetClass="entr" presetSubtype="8" fill="hold" grpId="0" nodeType="clickEffect">
-                                  <p:stCondLst>
-                                    <p:cond delay="0"/>
-                                  </p:stCondLst>
-                                  <p:childTnLst>
-                                    <p:set>
-                                      <p:cBhvr>
-                                        <p:cTn id="15" dur="1" fill="hold">
-                                          <p:stCondLst>
-                                            <p:cond delay="0"/>
-                                          </p:stCondLst>
-                                        </p:cTn>
-                                        <p:tgtEl>
-                                          <p:spTgt spid="3">
-                                            <p:txEl>
-                                              <p:pRg st="5" end="5"/>
-                                            </p:txEl>
-                                          </p:spTgt>
-                                        </p:tgtEl>
-                                        <p:attrNameLst>
-                                          <p:attrName>style.visibility</p:attrName>
-                                        </p:attrNameLst>
-                                      </p:cBhvr>
-                                      <p:to>
-                                        <p:strVal val="visible"/>
-                                      </p:to>
-                                    </p:set>
-                                    <p:animEffect transition="in" filter="wipe(left)">
-                                      <p:cBhvr>
-                                        <p:cTn id="16" dur="500"/>
-                                        <p:tgtEl>
-                                          <p:spTgt spid="3">
-                                            <p:txEl>
-                                              <p:pRg st="5" end="5"/>
-                                            </p:txEl>
-                                          </p:spTgt>
-                                        </p:tgtEl>
-                                      </p:cBhvr>
-                                    </p:animEffect>
-                                  </p:childTnLst>
-                                </p:cTn>
-                              </p:par>
-                            </p:childTnLst>
-                          </p:cTn>
-                        </p:par>
-                      </p:childTnLst>
-                    </p:cTn>
-                  </p:par>
-                  <p:par>
-                    <p:cTn id="17" fill="hold">
-                      <p:stCondLst>
-                        <p:cond delay="indefinite"/>
-                      </p:stCondLst>
-                      <p:childTnLst>
-                        <p:par>
-                          <p:cTn id="18" fill="hold">
-                            <p:stCondLst>
-                              <p:cond delay="0"/>
-                            </p:stCondLst>
-                            <p:childTnLst>
-                              <p:par>
-                                <p:cTn id="19" presetID="22" presetClass="entr" presetSubtype="8" fill="hold" grpId="0" nodeType="clickEffect">
-                                  <p:stCondLst>
-                                    <p:cond delay="0"/>
-                                  </p:stCondLst>
-                                  <p:childTnLst>
-                                    <p:set>
-                                      <p:cBhvr>
-                                        <p:cTn id="20" dur="1" fill="hold">
-                                          <p:stCondLst>
-                                            <p:cond delay="0"/>
-                                          </p:stCondLst>
-                                        </p:cTn>
-                                        <p:tgtEl>
-                                          <p:spTgt spid="3">
-                                            <p:txEl>
-                                              <p:pRg st="6" end="6"/>
-                                            </p:txEl>
-                                          </p:spTgt>
-                                        </p:tgtEl>
-                                        <p:attrNameLst>
-                                          <p:attrName>style.visibility</p:attrName>
-                                        </p:attrNameLst>
-                                      </p:cBhvr>
-                                      <p:to>
-                                        <p:strVal val="visible"/>
-                                      </p:to>
-                                    </p:set>
-                                    <p:animEffect transition="in" filter="wipe(left)">
-                                      <p:cBhvr>
-                                        <p:cTn id="21" dur="500"/>
-                                        <p:tgtEl>
-                                          <p:spTgt spid="3">
-                                            <p:txEl>
-                                              <p:pRg st="6" end="6"/>
-                                            </p:txEl>
-                                          </p:spTgt>
-                                        </p:tgtEl>
-                                      </p:cBhvr>
-                                    </p:animEffect>
-                                  </p:childTnLst>
-                                </p:cTn>
-                              </p:par>
-                              <p:par>
-                                <p:cTn id="22" presetID="22" presetClass="entr" presetSubtype="8" fill="hold" grpId="0" nodeType="withEffect">
-                                  <p:stCondLst>
-                                    <p:cond delay="0"/>
-                                  </p:stCondLst>
-                                  <p:childTnLst>
-                                    <p:set>
-                                      <p:cBhvr>
-                                        <p:cTn id="23" dur="1" fill="hold">
-                                          <p:stCondLst>
-                                            <p:cond delay="0"/>
-                                          </p:stCondLst>
-                                        </p:cTn>
-                                        <p:tgtEl>
-                                          <p:spTgt spid="3">
-                                            <p:txEl>
-                                              <p:pRg st="7" end="7"/>
-                                            </p:txEl>
-                                          </p:spTgt>
-                                        </p:tgtEl>
-                                        <p:attrNameLst>
-                                          <p:attrName>style.visibility</p:attrName>
-                                        </p:attrNameLst>
-                                      </p:cBhvr>
-                                      <p:to>
-                                        <p:strVal val="visible"/>
-                                      </p:to>
-                                    </p:set>
-                                    <p:animEffect transition="in" filter="wipe(left)">
-                                      <p:cBhvr>
-                                        <p:cTn id="24" dur="500"/>
-                                        <p:tgtEl>
-                                          <p:spTgt spid="3">
-                                            <p:txEl>
-                                              <p:pRg st="7" end="7"/>
-                                            </p:txEl>
-                                          </p:spTgt>
-                                        </p:tgtEl>
-                                      </p:cBhvr>
-                                    </p:animEffect>
-                                  </p:childTnLst>
-                                </p:cTn>
-                              </p:par>
-                            </p:childTnLst>
-                          </p:cTn>
-                        </p:par>
-                      </p:childTnLst>
-                    </p:cTn>
-                  </p:par>
-                </p:childTnLst>
-              </p:cTn>
-              <p:prevCondLst>
-                <p:cond evt="onPrev" delay="0">
-                  <p:tgtEl>
-                    <p:sldTgt/>
-                  </p:tgtEl>
-                </p:cond>
-              </p:prevCondLst>
-              <p:nextCondLst>
-                <p:cond evt="onNext" delay="0">
-                  <p:tgtEl>
-                    <p:sldTgt/>
-                  </p:tgtEl>
-                </p:cond>
-              </p:nextCondLst>
-            </p:seq>
-          </p:childTnLst>
-        </p:cTn>
-      </p:par>
-    </p:tnLst>
-    <p:bldLst>
-      <p:bldP spid="3" grpId="0" uiExpand="1" build="p"/>
-    </p:bldLst>
-  </p:timing>
-</p:sld>
-</file>
-
-<file path=ppt/slides/slide5.xml><?xml version="1.0" encoding="utf-8"?>
 <p:sld xmlns:a="http://schemas.openxmlformats.org/drawingml/2006/main" xmlns:r="http://schemas.openxmlformats.org/officeDocument/2006/relationships" xmlns:p="http://schemas.openxmlformats.org/presentationml/2006/main">
   <p:cSld>
     <p:spTree>
@@ -17139,6 +15313,16 @@
             </a:r>
           </a:p>
           <a:p>
+            <a:pPr marL="0" indent="0">
+              <a:buNone/>
+            </a:pPr>
+            <a:r>
+              <a:rPr lang="en-US"/>
+              <a:t>4 + 10 / 2;</a:t>
+            </a:r>
+            <a:endParaRPr lang="en-US" dirty="0"/>
+          </a:p>
+          <a:p>
             <a:pPr marL="514350" indent="-514350">
               <a:buFont typeface="+mj-lt"/>
               <a:buAutoNum type="alphaLcParenR"/>
@@ -17193,7 +15377,7 @@
 </p:sld>
 </file>
 
-<file path=ppt/slides/slide6.xml><?xml version="1.0" encoding="utf-8"?>
+<file path=ppt/slides/slide4.xml><?xml version="1.0" encoding="utf-8"?>
 <p:sld xmlns:a="http://schemas.openxmlformats.org/drawingml/2006/main" xmlns:r="http://schemas.openxmlformats.org/officeDocument/2006/relationships" xmlns:p="http://schemas.openxmlformats.org/presentationml/2006/main">
   <p:cSld>
     <p:spTree>
@@ -17360,7 +15544,7 @@
 </p:sld>
 </file>
 
-<file path=ppt/slides/slide7.xml><?xml version="1.0" encoding="utf-8"?>
+<file path=ppt/slides/slide5.xml><?xml version="1.0" encoding="utf-8"?>
 <p:sld xmlns:a="http://schemas.openxmlformats.org/drawingml/2006/main" xmlns:r="http://schemas.openxmlformats.org/officeDocument/2006/relationships" xmlns:p="http://schemas.openxmlformats.org/presentationml/2006/main">
   <p:cSld>
     <p:spTree>
@@ -18482,7 +16666,7 @@
 </p:sld>
 </file>
 
-<file path=ppt/slides/slide8.xml><?xml version="1.0" encoding="utf-8"?>
+<file path=ppt/slides/slide6.xml><?xml version="1.0" encoding="utf-8"?>
 <p:sld xmlns:a="http://schemas.openxmlformats.org/drawingml/2006/main" xmlns:r="http://schemas.openxmlformats.org/officeDocument/2006/relationships" xmlns:p="http://schemas.openxmlformats.org/presentationml/2006/main">
   <p:cSld>
     <p:spTree>
@@ -19470,7 +17654,7 @@
 </p:sld>
 </file>
 
-<file path=ppt/slides/slide9.xml><?xml version="1.0" encoding="utf-8"?>
+<file path=ppt/slides/slide7.xml><?xml version="1.0" encoding="utf-8"?>
 <p:sld xmlns:a="http://schemas.openxmlformats.org/drawingml/2006/main" xmlns:r="http://schemas.openxmlformats.org/officeDocument/2006/relationships" xmlns:p="http://schemas.openxmlformats.org/presentationml/2006/main">
   <p:cSld>
     <p:spTree>
@@ -20045,6 +18229,1381 @@
                                           <p:spTgt spid="3">
                                             <p:txEl>
                                               <p:pRg st="7" end="7"/>
+                                            </p:txEl>
+                                          </p:spTgt>
+                                        </p:tgtEl>
+                                      </p:cBhvr>
+                                    </p:animEffect>
+                                  </p:childTnLst>
+                                </p:cTn>
+                              </p:par>
+                            </p:childTnLst>
+                          </p:cTn>
+                        </p:par>
+                      </p:childTnLst>
+                    </p:cTn>
+                  </p:par>
+                </p:childTnLst>
+              </p:cTn>
+              <p:prevCondLst>
+                <p:cond evt="onPrev" delay="0">
+                  <p:tgtEl>
+                    <p:sldTgt/>
+                  </p:tgtEl>
+                </p:cond>
+              </p:prevCondLst>
+              <p:nextCondLst>
+                <p:cond evt="onNext" delay="0">
+                  <p:tgtEl>
+                    <p:sldTgt/>
+                  </p:tgtEl>
+                </p:cond>
+              </p:nextCondLst>
+            </p:seq>
+          </p:childTnLst>
+        </p:cTn>
+      </p:par>
+    </p:tnLst>
+  </p:timing>
+</p:sld>
+</file>
+
+<file path=ppt/slides/slide8.xml><?xml version="1.0" encoding="utf-8"?>
+<p:sld xmlns:a="http://schemas.openxmlformats.org/drawingml/2006/main" xmlns:r="http://schemas.openxmlformats.org/officeDocument/2006/relationships" xmlns:p="http://schemas.openxmlformats.org/presentationml/2006/main">
+  <p:cSld>
+    <p:spTree>
+      <p:nvGrpSpPr>
+        <p:cNvPr id="1" name=""/>
+        <p:cNvGrpSpPr/>
+        <p:nvPr/>
+      </p:nvGrpSpPr>
+      <p:grpSpPr>
+        <a:xfrm>
+          <a:off x="0" y="0"/>
+          <a:ext cx="0" cy="0"/>
+          <a:chOff x="0" y="0"/>
+          <a:chExt cx="0" cy="0"/>
+        </a:xfrm>
+      </p:grpSpPr>
+      <p:sp>
+        <p:nvSpPr>
+          <p:cNvPr id="2" name="Title 1"/>
+          <p:cNvSpPr>
+            <a:spLocks noGrp="1"/>
+          </p:cNvSpPr>
+          <p:nvPr>
+            <p:ph type="title"/>
+          </p:nvPr>
+        </p:nvSpPr>
+        <p:spPr/>
+        <p:txBody>
+          <a:bodyPr/>
+          <a:lstStyle/>
+          <a:p>
+            <a:r>
+              <a:rPr lang="en-US" dirty="0"/>
+              <a:t>Concatenation and Trimming</a:t>
+            </a:r>
+          </a:p>
+        </p:txBody>
+      </p:sp>
+      <p:sp>
+        <p:nvSpPr>
+          <p:cNvPr id="3" name="Content Placeholder 2"/>
+          <p:cNvSpPr>
+            <a:spLocks noGrp="1"/>
+          </p:cNvSpPr>
+          <p:nvPr>
+            <p:ph idx="1"/>
+          </p:nvPr>
+        </p:nvSpPr>
+        <p:spPr>
+          <a:xfrm>
+            <a:off x="494370" y="1524000"/>
+            <a:ext cx="8954429" cy="4525963"/>
+          </a:xfrm>
+        </p:spPr>
+        <p:txBody>
+          <a:bodyPr/>
+          <a:lstStyle/>
+          <a:p>
+            <a:r>
+              <a:rPr lang="en-US" sz="2000" dirty="0"/>
+              <a:t>Concatenation: </a:t>
+            </a:r>
+            <a:r>
+              <a:rPr lang="en-US" sz="2000" dirty="0">
+                <a:solidFill>
+                  <a:srgbClr val="FFFF00"/>
+                </a:solidFill>
+              </a:rPr>
+              <a:t>||</a:t>
+            </a:r>
+          </a:p>
+          <a:p>
+            <a:pPr lvl="1"/>
+            <a:r>
+              <a:rPr lang="en-US" sz="2000" dirty="0"/>
+              <a:t>Combines text variables into one</a:t>
+            </a:r>
+          </a:p>
+          <a:p>
+            <a:pPr marL="457200" lvl="1" indent="0">
+              <a:buNone/>
+            </a:pPr>
+            <a:r>
+              <a:rPr lang="en-US" sz="2000" dirty="0"/>
+              <a:t>	</a:t>
+            </a:r>
+            <a:r>
+              <a:rPr lang="en-US" sz="2000" dirty="0" err="1">
+                <a:solidFill>
+                  <a:srgbClr val="FFFF00"/>
+                </a:solidFill>
+              </a:rPr>
+              <a:t>fullname</a:t>
+            </a:r>
+            <a:r>
+              <a:rPr lang="en-US" sz="2000" dirty="0">
+                <a:solidFill>
+                  <a:srgbClr val="FFFF00"/>
+                </a:solidFill>
+              </a:rPr>
+              <a:t> = </a:t>
+            </a:r>
+            <a:r>
+              <a:rPr lang="en-US" sz="2000" dirty="0" err="1">
+                <a:solidFill>
+                  <a:srgbClr val="FFFF00"/>
+                </a:solidFill>
+              </a:rPr>
+              <a:t>firstname</a:t>
+            </a:r>
+            <a:r>
+              <a:rPr lang="en-US" sz="2000" dirty="0">
+                <a:solidFill>
+                  <a:srgbClr val="FFFF00"/>
+                </a:solidFill>
+              </a:rPr>
+              <a:t> || ‘ ‘ || </a:t>
+            </a:r>
+            <a:r>
+              <a:rPr lang="en-US" sz="2000" dirty="0" err="1">
+                <a:solidFill>
+                  <a:srgbClr val="FFFF00"/>
+                </a:solidFill>
+              </a:rPr>
+              <a:t>lastname</a:t>
+            </a:r>
+            <a:r>
+              <a:rPr lang="en-US" sz="2000" dirty="0">
+                <a:solidFill>
+                  <a:srgbClr val="FFFF00"/>
+                </a:solidFill>
+              </a:rPr>
+              <a:t>;</a:t>
+            </a:r>
+          </a:p>
+          <a:p>
+            <a:pPr marL="457200" lvl="1" indent="0">
+              <a:buNone/>
+            </a:pPr>
+            <a:r>
+              <a:rPr lang="en-US" sz="2000" dirty="0"/>
+              <a:t>	</a:t>
+            </a:r>
+            <a:r>
+              <a:rPr lang="en-US" sz="2000" dirty="0" err="1">
+                <a:solidFill>
+                  <a:schemeClr val="tx2">
+                    <a:lumMod val="75000"/>
+                  </a:schemeClr>
+                </a:solidFill>
+              </a:rPr>
+              <a:t>firstname</a:t>
+            </a:r>
+            <a:r>
+              <a:rPr lang="en-US" sz="2000" dirty="0">
+                <a:solidFill>
+                  <a:schemeClr val="tx2">
+                    <a:lumMod val="75000"/>
+                  </a:schemeClr>
+                </a:solidFill>
+              </a:rPr>
+              <a:t> = ‘Wendy’ </a:t>
+            </a:r>
+            <a:r>
+              <a:rPr lang="en-US" sz="2000" dirty="0"/>
+              <a:t>and </a:t>
+            </a:r>
+            <a:r>
+              <a:rPr lang="en-US" sz="2000" dirty="0" err="1">
+                <a:solidFill>
+                  <a:schemeClr val="tx2">
+                    <a:lumMod val="75000"/>
+                  </a:schemeClr>
+                </a:solidFill>
+              </a:rPr>
+              <a:t>lastname</a:t>
+            </a:r>
+            <a:r>
+              <a:rPr lang="en-US" sz="2000" dirty="0">
+                <a:solidFill>
+                  <a:schemeClr val="tx2">
+                    <a:lumMod val="75000"/>
+                  </a:schemeClr>
+                </a:solidFill>
+              </a:rPr>
+              <a:t> = ‘Smith’</a:t>
+            </a:r>
+          </a:p>
+          <a:p>
+            <a:pPr marL="457200" lvl="1" indent="0">
+              <a:buNone/>
+            </a:pPr>
+            <a:r>
+              <a:rPr lang="en-US" sz="2000" dirty="0"/>
+              <a:t>	becomes </a:t>
+            </a:r>
+            <a:r>
+              <a:rPr lang="en-US" sz="2000" dirty="0" err="1">
+                <a:solidFill>
+                  <a:schemeClr val="tx2">
+                    <a:lumMod val="75000"/>
+                  </a:schemeClr>
+                </a:solidFill>
+              </a:rPr>
+              <a:t>fullname</a:t>
+            </a:r>
+            <a:r>
+              <a:rPr lang="en-US" sz="2000" dirty="0">
+                <a:solidFill>
+                  <a:schemeClr val="tx2">
+                    <a:lumMod val="75000"/>
+                  </a:schemeClr>
+                </a:solidFill>
+              </a:rPr>
+              <a:t> = ‘Wendy Smith’</a:t>
+            </a:r>
+          </a:p>
+          <a:p>
+            <a:r>
+              <a:rPr lang="en-US" sz="2000" dirty="0">
+                <a:solidFill>
+                  <a:srgbClr val="FFFF00"/>
+                </a:solidFill>
+              </a:rPr>
+              <a:t>LEFT</a:t>
+            </a:r>
+            <a:r>
+              <a:rPr lang="en-US" sz="2000" dirty="0"/>
+              <a:t>, </a:t>
+            </a:r>
+            <a:r>
+              <a:rPr lang="en-US" sz="2000" dirty="0">
+                <a:solidFill>
+                  <a:srgbClr val="FFFF00"/>
+                </a:solidFill>
+              </a:rPr>
+              <a:t>RIGHT</a:t>
+            </a:r>
+            <a:r>
+              <a:rPr lang="en-US" sz="2000" dirty="0"/>
+              <a:t>, </a:t>
+            </a:r>
+            <a:r>
+              <a:rPr lang="en-US" sz="2000" dirty="0">
+                <a:solidFill>
+                  <a:srgbClr val="FFFF00"/>
+                </a:solidFill>
+              </a:rPr>
+              <a:t>TRIM</a:t>
+            </a:r>
+            <a:r>
+              <a:rPr lang="en-US" sz="2000" dirty="0"/>
+              <a:t>, </a:t>
+            </a:r>
+            <a:r>
+              <a:rPr lang="en-US" sz="2000" dirty="0">
+                <a:solidFill>
+                  <a:srgbClr val="FFFF00"/>
+                </a:solidFill>
+              </a:rPr>
+              <a:t>COMPRESS</a:t>
+            </a:r>
+          </a:p>
+          <a:p>
+            <a:pPr lvl="1"/>
+            <a:r>
+              <a:rPr lang="en-US" sz="2000" dirty="0"/>
+              <a:t>Removes blanks from variables</a:t>
+            </a:r>
+          </a:p>
+          <a:p>
+            <a:pPr lvl="1"/>
+            <a:r>
+              <a:rPr lang="en-US" sz="2000" dirty="0">
+                <a:solidFill>
+                  <a:srgbClr val="FFFF00"/>
+                </a:solidFill>
+              </a:rPr>
+              <a:t>LEFT</a:t>
+            </a:r>
+            <a:r>
+              <a:rPr lang="en-US" sz="2000" dirty="0"/>
+              <a:t> and </a:t>
+            </a:r>
+            <a:r>
+              <a:rPr lang="en-US" sz="2000" dirty="0">
+                <a:solidFill>
+                  <a:srgbClr val="FFFF00"/>
+                </a:solidFill>
+              </a:rPr>
+              <a:t>RIGHT</a:t>
+            </a:r>
+            <a:r>
+              <a:rPr lang="en-US" sz="2000" dirty="0"/>
+              <a:t> align the string</a:t>
+            </a:r>
+          </a:p>
+          <a:p>
+            <a:pPr lvl="1"/>
+            <a:r>
+              <a:rPr lang="en-US" sz="2000" dirty="0">
+                <a:solidFill>
+                  <a:srgbClr val="FFFF00"/>
+                </a:solidFill>
+              </a:rPr>
+              <a:t>TRIM</a:t>
+            </a:r>
+            <a:r>
+              <a:rPr lang="en-US" sz="2000" dirty="0"/>
+              <a:t> removes trailing blanks</a:t>
+            </a:r>
+          </a:p>
+          <a:p>
+            <a:pPr lvl="1"/>
+            <a:r>
+              <a:rPr lang="en-US" sz="2000" dirty="0">
+                <a:solidFill>
+                  <a:srgbClr val="FFFF00"/>
+                </a:solidFill>
+              </a:rPr>
+              <a:t>COMPRESS</a:t>
+            </a:r>
+            <a:r>
+              <a:rPr lang="en-US" sz="2000" dirty="0"/>
+              <a:t> removes all blanks (or other)</a:t>
+            </a:r>
+          </a:p>
+          <a:p>
+            <a:pPr marL="914400" lvl="2" indent="0">
+              <a:buNone/>
+            </a:pPr>
+            <a:r>
+              <a:rPr lang="en-US" sz="1600" dirty="0">
+                <a:latin typeface="Courier New" panose="02070309020205020404" pitchFamily="49" charset="0"/>
+                <a:cs typeface="Courier New" panose="02070309020205020404" pitchFamily="49" charset="0"/>
+              </a:rPr>
+              <a:t>compress(variable, &lt;exact characters to remove&gt;, &lt;modifiers&gt;)</a:t>
+            </a:r>
+          </a:p>
+          <a:p>
+            <a:pPr marL="914400" lvl="2" indent="0">
+              <a:buNone/>
+            </a:pPr>
+            <a:r>
+              <a:rPr lang="en-US" sz="1600" dirty="0">
+                <a:latin typeface="Courier New" panose="02070309020205020404" pitchFamily="49" charset="0"/>
+                <a:cs typeface="Courier New" panose="02070309020205020404" pitchFamily="49" charset="0"/>
+              </a:rPr>
+              <a:t>compress(variable) will remove spaces by default</a:t>
+            </a:r>
+          </a:p>
+          <a:p>
+            <a:pPr marL="457200" lvl="1" indent="0">
+              <a:buNone/>
+            </a:pPr>
+            <a:r>
+              <a:rPr lang="en-US" sz="1600" dirty="0">
+                <a:latin typeface="Courier New" panose="02070309020205020404" pitchFamily="49" charset="0"/>
+                <a:cs typeface="Courier New" panose="02070309020205020404" pitchFamily="49" charset="0"/>
+              </a:rPr>
+              <a:t>	compress(variable, , ‘</a:t>
+            </a:r>
+            <a:r>
+              <a:rPr lang="en-US" sz="1600" dirty="0" err="1">
+                <a:latin typeface="Courier New" panose="02070309020205020404" pitchFamily="49" charset="0"/>
+                <a:cs typeface="Courier New" panose="02070309020205020404" pitchFamily="49" charset="0"/>
+              </a:rPr>
+              <a:t>kd</a:t>
+            </a:r>
+            <a:r>
+              <a:rPr lang="en-US" sz="1600" dirty="0">
+                <a:latin typeface="Courier New" panose="02070309020205020404" pitchFamily="49" charset="0"/>
+                <a:cs typeface="Courier New" panose="02070309020205020404" pitchFamily="49" charset="0"/>
+              </a:rPr>
+              <a:t>’) will keep numeric digits</a:t>
+            </a:r>
+          </a:p>
+          <a:p>
+            <a:pPr marL="457200" lvl="1" indent="0">
+              <a:buNone/>
+            </a:pPr>
+            <a:r>
+              <a:rPr lang="en-US" sz="1600" dirty="0">
+                <a:latin typeface="Courier New" panose="02070309020205020404" pitchFamily="49" charset="0"/>
+                <a:cs typeface="Courier New" panose="02070309020205020404" pitchFamily="49" charset="0"/>
+              </a:rPr>
+              <a:t>	compress(variable, , ‘d’) will remove numeric digits</a:t>
+            </a:r>
+          </a:p>
+          <a:p>
+            <a:pPr marL="457200" lvl="1" indent="0">
+              <a:buNone/>
+            </a:pPr>
+            <a:r>
+              <a:rPr lang="en-US" sz="1600" dirty="0"/>
+              <a:t>	</a:t>
+            </a:r>
+          </a:p>
+        </p:txBody>
+      </p:sp>
+    </p:spTree>
+    <p:extLst>
+      <p:ext uri="{BB962C8B-B14F-4D97-AF65-F5344CB8AC3E}">
+        <p14:creationId xmlns:p14="http://schemas.microsoft.com/office/powerpoint/2010/main" val="3022407107"/>
+      </p:ext>
+    </p:extLst>
+  </p:cSld>
+  <p:clrMapOvr>
+    <a:masterClrMapping/>
+  </p:clrMapOvr>
+  <p:timing>
+    <p:tnLst>
+      <p:par>
+        <p:cTn id="1" dur="indefinite" restart="never" nodeType="tmRoot">
+          <p:childTnLst>
+            <p:seq concurrent="1" nextAc="seek">
+              <p:cTn id="2" dur="indefinite" nodeType="mainSeq">
+                <p:childTnLst>
+                  <p:par>
+                    <p:cTn id="3" fill="hold">
+                      <p:stCondLst>
+                        <p:cond delay="indefinite"/>
+                      </p:stCondLst>
+                      <p:childTnLst>
+                        <p:par>
+                          <p:cTn id="4" fill="hold">
+                            <p:stCondLst>
+                              <p:cond delay="0"/>
+                            </p:stCondLst>
+                            <p:childTnLst>
+                              <p:par>
+                                <p:cTn id="5" presetID="22" presetClass="entr" presetSubtype="8" fill="hold" grpId="0" nodeType="clickEffect">
+                                  <p:stCondLst>
+                                    <p:cond delay="0"/>
+                                  </p:stCondLst>
+                                  <p:childTnLst>
+                                    <p:set>
+                                      <p:cBhvr>
+                                        <p:cTn id="6" dur="1" fill="hold">
+                                          <p:stCondLst>
+                                            <p:cond delay="0"/>
+                                          </p:stCondLst>
+                                        </p:cTn>
+                                        <p:tgtEl>
+                                          <p:spTgt spid="3">
+                                            <p:txEl>
+                                              <p:pRg st="5" end="5"/>
+                                            </p:txEl>
+                                          </p:spTgt>
+                                        </p:tgtEl>
+                                        <p:attrNameLst>
+                                          <p:attrName>style.visibility</p:attrName>
+                                        </p:attrNameLst>
+                                      </p:cBhvr>
+                                      <p:to>
+                                        <p:strVal val="visible"/>
+                                      </p:to>
+                                    </p:set>
+                                    <p:animEffect transition="in" filter="wipe(left)">
+                                      <p:cBhvr>
+                                        <p:cTn id="7" dur="500"/>
+                                        <p:tgtEl>
+                                          <p:spTgt spid="3">
+                                            <p:txEl>
+                                              <p:pRg st="5" end="5"/>
+                                            </p:txEl>
+                                          </p:spTgt>
+                                        </p:tgtEl>
+                                      </p:cBhvr>
+                                    </p:animEffect>
+                                  </p:childTnLst>
+                                </p:cTn>
+                              </p:par>
+                              <p:par>
+                                <p:cTn id="8" presetID="22" presetClass="entr" presetSubtype="8" fill="hold" grpId="0" nodeType="withEffect">
+                                  <p:stCondLst>
+                                    <p:cond delay="0"/>
+                                  </p:stCondLst>
+                                  <p:childTnLst>
+                                    <p:set>
+                                      <p:cBhvr>
+                                        <p:cTn id="9" dur="1" fill="hold">
+                                          <p:stCondLst>
+                                            <p:cond delay="0"/>
+                                          </p:stCondLst>
+                                        </p:cTn>
+                                        <p:tgtEl>
+                                          <p:spTgt spid="3">
+                                            <p:txEl>
+                                              <p:pRg st="6" end="6"/>
+                                            </p:txEl>
+                                          </p:spTgt>
+                                        </p:tgtEl>
+                                        <p:attrNameLst>
+                                          <p:attrName>style.visibility</p:attrName>
+                                        </p:attrNameLst>
+                                      </p:cBhvr>
+                                      <p:to>
+                                        <p:strVal val="visible"/>
+                                      </p:to>
+                                    </p:set>
+                                    <p:animEffect transition="in" filter="wipe(left)">
+                                      <p:cBhvr>
+                                        <p:cTn id="10" dur="500"/>
+                                        <p:tgtEl>
+                                          <p:spTgt spid="3">
+                                            <p:txEl>
+                                              <p:pRg st="6" end="6"/>
+                                            </p:txEl>
+                                          </p:spTgt>
+                                        </p:tgtEl>
+                                      </p:cBhvr>
+                                    </p:animEffect>
+                                  </p:childTnLst>
+                                </p:cTn>
+                              </p:par>
+                              <p:par>
+                                <p:cTn id="11" presetID="22" presetClass="entr" presetSubtype="8" fill="hold" grpId="0" nodeType="withEffect">
+                                  <p:stCondLst>
+                                    <p:cond delay="0"/>
+                                  </p:stCondLst>
+                                  <p:childTnLst>
+                                    <p:set>
+                                      <p:cBhvr>
+                                        <p:cTn id="12" dur="1" fill="hold">
+                                          <p:stCondLst>
+                                            <p:cond delay="0"/>
+                                          </p:stCondLst>
+                                        </p:cTn>
+                                        <p:tgtEl>
+                                          <p:spTgt spid="3">
+                                            <p:txEl>
+                                              <p:pRg st="7" end="7"/>
+                                            </p:txEl>
+                                          </p:spTgt>
+                                        </p:tgtEl>
+                                        <p:attrNameLst>
+                                          <p:attrName>style.visibility</p:attrName>
+                                        </p:attrNameLst>
+                                      </p:cBhvr>
+                                      <p:to>
+                                        <p:strVal val="visible"/>
+                                      </p:to>
+                                    </p:set>
+                                    <p:animEffect transition="in" filter="wipe(left)">
+                                      <p:cBhvr>
+                                        <p:cTn id="13" dur="500"/>
+                                        <p:tgtEl>
+                                          <p:spTgt spid="3">
+                                            <p:txEl>
+                                              <p:pRg st="7" end="7"/>
+                                            </p:txEl>
+                                          </p:spTgt>
+                                        </p:tgtEl>
+                                      </p:cBhvr>
+                                    </p:animEffect>
+                                  </p:childTnLst>
+                                </p:cTn>
+                              </p:par>
+                              <p:par>
+                                <p:cTn id="14" presetID="22" presetClass="entr" presetSubtype="8" fill="hold" grpId="0" nodeType="withEffect">
+                                  <p:stCondLst>
+                                    <p:cond delay="0"/>
+                                  </p:stCondLst>
+                                  <p:childTnLst>
+                                    <p:set>
+                                      <p:cBhvr>
+                                        <p:cTn id="15" dur="1" fill="hold">
+                                          <p:stCondLst>
+                                            <p:cond delay="0"/>
+                                          </p:stCondLst>
+                                        </p:cTn>
+                                        <p:tgtEl>
+                                          <p:spTgt spid="3">
+                                            <p:txEl>
+                                              <p:pRg st="8" end="8"/>
+                                            </p:txEl>
+                                          </p:spTgt>
+                                        </p:tgtEl>
+                                        <p:attrNameLst>
+                                          <p:attrName>style.visibility</p:attrName>
+                                        </p:attrNameLst>
+                                      </p:cBhvr>
+                                      <p:to>
+                                        <p:strVal val="visible"/>
+                                      </p:to>
+                                    </p:set>
+                                    <p:animEffect transition="in" filter="wipe(left)">
+                                      <p:cBhvr>
+                                        <p:cTn id="16" dur="500"/>
+                                        <p:tgtEl>
+                                          <p:spTgt spid="3">
+                                            <p:txEl>
+                                              <p:pRg st="8" end="8"/>
+                                            </p:txEl>
+                                          </p:spTgt>
+                                        </p:tgtEl>
+                                      </p:cBhvr>
+                                    </p:animEffect>
+                                  </p:childTnLst>
+                                </p:cTn>
+                              </p:par>
+                              <p:par>
+                                <p:cTn id="17" presetID="22" presetClass="entr" presetSubtype="8" fill="hold" grpId="0" nodeType="withEffect">
+                                  <p:stCondLst>
+                                    <p:cond delay="0"/>
+                                  </p:stCondLst>
+                                  <p:childTnLst>
+                                    <p:set>
+                                      <p:cBhvr>
+                                        <p:cTn id="18" dur="1" fill="hold">
+                                          <p:stCondLst>
+                                            <p:cond delay="0"/>
+                                          </p:stCondLst>
+                                        </p:cTn>
+                                        <p:tgtEl>
+                                          <p:spTgt spid="3">
+                                            <p:txEl>
+                                              <p:pRg st="9" end="9"/>
+                                            </p:txEl>
+                                          </p:spTgt>
+                                        </p:tgtEl>
+                                        <p:attrNameLst>
+                                          <p:attrName>style.visibility</p:attrName>
+                                        </p:attrNameLst>
+                                      </p:cBhvr>
+                                      <p:to>
+                                        <p:strVal val="visible"/>
+                                      </p:to>
+                                    </p:set>
+                                    <p:animEffect transition="in" filter="wipe(left)">
+                                      <p:cBhvr>
+                                        <p:cTn id="19" dur="500"/>
+                                        <p:tgtEl>
+                                          <p:spTgt spid="3">
+                                            <p:txEl>
+                                              <p:pRg st="9" end="9"/>
+                                            </p:txEl>
+                                          </p:spTgt>
+                                        </p:tgtEl>
+                                      </p:cBhvr>
+                                    </p:animEffect>
+                                  </p:childTnLst>
+                                </p:cTn>
+                              </p:par>
+                              <p:par>
+                                <p:cTn id="20" presetID="22" presetClass="entr" presetSubtype="8" fill="hold" grpId="0" nodeType="withEffect">
+                                  <p:stCondLst>
+                                    <p:cond delay="0"/>
+                                  </p:stCondLst>
+                                  <p:childTnLst>
+                                    <p:set>
+                                      <p:cBhvr>
+                                        <p:cTn id="21" dur="1" fill="hold">
+                                          <p:stCondLst>
+                                            <p:cond delay="0"/>
+                                          </p:stCondLst>
+                                        </p:cTn>
+                                        <p:tgtEl>
+                                          <p:spTgt spid="3">
+                                            <p:txEl>
+                                              <p:pRg st="10" end="10"/>
+                                            </p:txEl>
+                                          </p:spTgt>
+                                        </p:tgtEl>
+                                        <p:attrNameLst>
+                                          <p:attrName>style.visibility</p:attrName>
+                                        </p:attrNameLst>
+                                      </p:cBhvr>
+                                      <p:to>
+                                        <p:strVal val="visible"/>
+                                      </p:to>
+                                    </p:set>
+                                    <p:animEffect transition="in" filter="wipe(left)">
+                                      <p:cBhvr>
+                                        <p:cTn id="22" dur="500"/>
+                                        <p:tgtEl>
+                                          <p:spTgt spid="3">
+                                            <p:txEl>
+                                              <p:pRg st="10" end="10"/>
+                                            </p:txEl>
+                                          </p:spTgt>
+                                        </p:tgtEl>
+                                      </p:cBhvr>
+                                    </p:animEffect>
+                                  </p:childTnLst>
+                                </p:cTn>
+                              </p:par>
+                              <p:par>
+                                <p:cTn id="23" presetID="22" presetClass="entr" presetSubtype="8" fill="hold" grpId="0" nodeType="withEffect">
+                                  <p:stCondLst>
+                                    <p:cond delay="0"/>
+                                  </p:stCondLst>
+                                  <p:childTnLst>
+                                    <p:set>
+                                      <p:cBhvr>
+                                        <p:cTn id="24" dur="1" fill="hold">
+                                          <p:stCondLst>
+                                            <p:cond delay="0"/>
+                                          </p:stCondLst>
+                                        </p:cTn>
+                                        <p:tgtEl>
+                                          <p:spTgt spid="3">
+                                            <p:txEl>
+                                              <p:pRg st="11" end="11"/>
+                                            </p:txEl>
+                                          </p:spTgt>
+                                        </p:tgtEl>
+                                        <p:attrNameLst>
+                                          <p:attrName>style.visibility</p:attrName>
+                                        </p:attrNameLst>
+                                      </p:cBhvr>
+                                      <p:to>
+                                        <p:strVal val="visible"/>
+                                      </p:to>
+                                    </p:set>
+                                    <p:animEffect transition="in" filter="wipe(left)">
+                                      <p:cBhvr>
+                                        <p:cTn id="25" dur="500"/>
+                                        <p:tgtEl>
+                                          <p:spTgt spid="3">
+                                            <p:txEl>
+                                              <p:pRg st="11" end="11"/>
+                                            </p:txEl>
+                                          </p:spTgt>
+                                        </p:tgtEl>
+                                      </p:cBhvr>
+                                    </p:animEffect>
+                                  </p:childTnLst>
+                                </p:cTn>
+                              </p:par>
+                              <p:par>
+                                <p:cTn id="26" presetID="22" presetClass="entr" presetSubtype="8" fill="hold" grpId="0" nodeType="withEffect">
+                                  <p:stCondLst>
+                                    <p:cond delay="0"/>
+                                  </p:stCondLst>
+                                  <p:childTnLst>
+                                    <p:set>
+                                      <p:cBhvr>
+                                        <p:cTn id="27" dur="1" fill="hold">
+                                          <p:stCondLst>
+                                            <p:cond delay="0"/>
+                                          </p:stCondLst>
+                                        </p:cTn>
+                                        <p:tgtEl>
+                                          <p:spTgt spid="3">
+                                            <p:txEl>
+                                              <p:pRg st="12" end="12"/>
+                                            </p:txEl>
+                                          </p:spTgt>
+                                        </p:tgtEl>
+                                        <p:attrNameLst>
+                                          <p:attrName>style.visibility</p:attrName>
+                                        </p:attrNameLst>
+                                      </p:cBhvr>
+                                      <p:to>
+                                        <p:strVal val="visible"/>
+                                      </p:to>
+                                    </p:set>
+                                    <p:animEffect transition="in" filter="wipe(left)">
+                                      <p:cBhvr>
+                                        <p:cTn id="28" dur="500"/>
+                                        <p:tgtEl>
+                                          <p:spTgt spid="3">
+                                            <p:txEl>
+                                              <p:pRg st="12" end="12"/>
+                                            </p:txEl>
+                                          </p:spTgt>
+                                        </p:tgtEl>
+                                      </p:cBhvr>
+                                    </p:animEffect>
+                                  </p:childTnLst>
+                                </p:cTn>
+                              </p:par>
+                              <p:par>
+                                <p:cTn id="29" presetID="22" presetClass="entr" presetSubtype="8" fill="hold" grpId="0" nodeType="withEffect">
+                                  <p:stCondLst>
+                                    <p:cond delay="0"/>
+                                  </p:stCondLst>
+                                  <p:childTnLst>
+                                    <p:set>
+                                      <p:cBhvr>
+                                        <p:cTn id="30" dur="1" fill="hold">
+                                          <p:stCondLst>
+                                            <p:cond delay="0"/>
+                                          </p:stCondLst>
+                                        </p:cTn>
+                                        <p:tgtEl>
+                                          <p:spTgt spid="3">
+                                            <p:txEl>
+                                              <p:pRg st="13" end="13"/>
+                                            </p:txEl>
+                                          </p:spTgt>
+                                        </p:tgtEl>
+                                        <p:attrNameLst>
+                                          <p:attrName>style.visibility</p:attrName>
+                                        </p:attrNameLst>
+                                      </p:cBhvr>
+                                      <p:to>
+                                        <p:strVal val="visible"/>
+                                      </p:to>
+                                    </p:set>
+                                    <p:animEffect transition="in" filter="wipe(left)">
+                                      <p:cBhvr>
+                                        <p:cTn id="31" dur="500"/>
+                                        <p:tgtEl>
+                                          <p:spTgt spid="3">
+                                            <p:txEl>
+                                              <p:pRg st="13" end="13"/>
+                                            </p:txEl>
+                                          </p:spTgt>
+                                        </p:tgtEl>
+                                      </p:cBhvr>
+                                    </p:animEffect>
+                                  </p:childTnLst>
+                                </p:cTn>
+                              </p:par>
+                              <p:par>
+                                <p:cTn id="32" presetID="22" presetClass="entr" presetSubtype="8" fill="hold" grpId="0" nodeType="withEffect">
+                                  <p:stCondLst>
+                                    <p:cond delay="0"/>
+                                  </p:stCondLst>
+                                  <p:childTnLst>
+                                    <p:set>
+                                      <p:cBhvr>
+                                        <p:cTn id="33" dur="1" fill="hold">
+                                          <p:stCondLst>
+                                            <p:cond delay="0"/>
+                                          </p:stCondLst>
+                                        </p:cTn>
+                                        <p:tgtEl>
+                                          <p:spTgt spid="3">
+                                            <p:txEl>
+                                              <p:pRg st="14" end="14"/>
+                                            </p:txEl>
+                                          </p:spTgt>
+                                        </p:tgtEl>
+                                        <p:attrNameLst>
+                                          <p:attrName>style.visibility</p:attrName>
+                                        </p:attrNameLst>
+                                      </p:cBhvr>
+                                      <p:to>
+                                        <p:strVal val="visible"/>
+                                      </p:to>
+                                    </p:set>
+                                    <p:animEffect transition="in" filter="wipe(left)">
+                                      <p:cBhvr>
+                                        <p:cTn id="34" dur="500"/>
+                                        <p:tgtEl>
+                                          <p:spTgt spid="3">
+                                            <p:txEl>
+                                              <p:pRg st="14" end="14"/>
+                                            </p:txEl>
+                                          </p:spTgt>
+                                        </p:tgtEl>
+                                      </p:cBhvr>
+                                    </p:animEffect>
+                                  </p:childTnLst>
+                                </p:cTn>
+                              </p:par>
+                            </p:childTnLst>
+                          </p:cTn>
+                        </p:par>
+                      </p:childTnLst>
+                    </p:cTn>
+                  </p:par>
+                </p:childTnLst>
+              </p:cTn>
+              <p:prevCondLst>
+                <p:cond evt="onPrev" delay="0">
+                  <p:tgtEl>
+                    <p:sldTgt/>
+                  </p:tgtEl>
+                </p:cond>
+              </p:prevCondLst>
+              <p:nextCondLst>
+                <p:cond evt="onNext" delay="0">
+                  <p:tgtEl>
+                    <p:sldTgt/>
+                  </p:tgtEl>
+                </p:cond>
+              </p:nextCondLst>
+            </p:seq>
+          </p:childTnLst>
+        </p:cTn>
+      </p:par>
+    </p:tnLst>
+    <p:bldLst>
+      <p:bldP spid="3" grpId="0" uiExpand="1" build="p"/>
+    </p:bldLst>
+  </p:timing>
+</p:sld>
+</file>
+
+<file path=ppt/slides/slide9.xml><?xml version="1.0" encoding="utf-8"?>
+<p:sld xmlns:a="http://schemas.openxmlformats.org/drawingml/2006/main" xmlns:r="http://schemas.openxmlformats.org/officeDocument/2006/relationships" xmlns:p="http://schemas.openxmlformats.org/presentationml/2006/main">
+  <p:cSld>
+    <p:spTree>
+      <p:nvGrpSpPr>
+        <p:cNvPr id="1" name=""/>
+        <p:cNvGrpSpPr/>
+        <p:nvPr/>
+      </p:nvGrpSpPr>
+      <p:grpSpPr>
+        <a:xfrm>
+          <a:off x="0" y="0"/>
+          <a:ext cx="0" cy="0"/>
+          <a:chOff x="0" y="0"/>
+          <a:chExt cx="0" cy="0"/>
+        </a:xfrm>
+      </p:grpSpPr>
+      <p:sp>
+        <p:nvSpPr>
+          <p:cNvPr id="2" name="Title 1"/>
+          <p:cNvSpPr>
+            <a:spLocks noGrp="1"/>
+          </p:cNvSpPr>
+          <p:nvPr>
+            <p:ph type="title"/>
+          </p:nvPr>
+        </p:nvSpPr>
+        <p:spPr/>
+        <p:txBody>
+          <a:bodyPr/>
+          <a:lstStyle/>
+          <a:p>
+            <a:r>
+              <a:rPr lang="en-US" dirty="0"/>
+              <a:t>Character </a:t>
+            </a:r>
+            <a:r>
+              <a:rPr lang="en-US" dirty="0">
+                <a:sym typeface="Wingdings" panose="05000000000000000000" pitchFamily="2" charset="2"/>
+              </a:rPr>
+              <a:t> </a:t>
+            </a:r>
+            <a:r>
+              <a:rPr lang="en-US" dirty="0"/>
+              <a:t>Numeric</a:t>
+            </a:r>
+          </a:p>
+        </p:txBody>
+      </p:sp>
+      <p:sp>
+        <p:nvSpPr>
+          <p:cNvPr id="3" name="Content Placeholder 2"/>
+          <p:cNvSpPr>
+            <a:spLocks noGrp="1"/>
+          </p:cNvSpPr>
+          <p:nvPr>
+            <p:ph idx="1"/>
+          </p:nvPr>
+        </p:nvSpPr>
+        <p:spPr/>
+        <p:txBody>
+          <a:bodyPr/>
+          <a:lstStyle/>
+          <a:p>
+            <a:r>
+              <a:rPr lang="en-US" dirty="0">
+                <a:solidFill>
+                  <a:srgbClr val="FFFF00"/>
+                </a:solidFill>
+              </a:rPr>
+              <a:t>PUT</a:t>
+            </a:r>
+            <a:r>
+              <a:rPr lang="en-US" dirty="0"/>
+              <a:t> – changes variable format</a:t>
+            </a:r>
+          </a:p>
+          <a:p>
+            <a:pPr lvl="1"/>
+            <a:r>
+              <a:rPr lang="en-US" dirty="0"/>
+              <a:t>Makes variable character</a:t>
+            </a:r>
+          </a:p>
+          <a:p>
+            <a:pPr marL="457200" lvl="1" indent="0">
+              <a:buNone/>
+            </a:pPr>
+            <a:r>
+              <a:rPr lang="en-US" dirty="0">
+                <a:solidFill>
+                  <a:schemeClr val="tx2">
+                    <a:lumMod val="75000"/>
+                  </a:schemeClr>
+                </a:solidFill>
+              </a:rPr>
+              <a:t>	</a:t>
+            </a:r>
+            <a:r>
+              <a:rPr lang="en-US" dirty="0" err="1">
+                <a:solidFill>
+                  <a:schemeClr val="tx2">
+                    <a:lumMod val="75000"/>
+                  </a:schemeClr>
+                </a:solidFill>
+              </a:rPr>
+              <a:t>idchar</a:t>
+            </a:r>
+            <a:r>
+              <a:rPr lang="en-US" dirty="0">
+                <a:solidFill>
+                  <a:schemeClr val="tx2">
+                    <a:lumMod val="75000"/>
+                  </a:schemeClr>
+                </a:solidFill>
+              </a:rPr>
+              <a:t> = put(idnum,$8.);</a:t>
+            </a:r>
+          </a:p>
+          <a:p>
+            <a:r>
+              <a:rPr lang="en-US" dirty="0">
+                <a:solidFill>
+                  <a:srgbClr val="FFFF00"/>
+                </a:solidFill>
+              </a:rPr>
+              <a:t>INPUT</a:t>
+            </a:r>
+            <a:r>
+              <a:rPr lang="en-US" dirty="0"/>
+              <a:t> – makes variable numeric</a:t>
+            </a:r>
+          </a:p>
+          <a:p>
+            <a:pPr marL="457200" lvl="1" indent="0">
+              <a:buNone/>
+            </a:pPr>
+            <a:r>
+              <a:rPr lang="en-US" dirty="0">
+                <a:solidFill>
+                  <a:schemeClr val="tx2">
+                    <a:lumMod val="75000"/>
+                  </a:schemeClr>
+                </a:solidFill>
+              </a:rPr>
+              <a:t>	</a:t>
+            </a:r>
+            <a:r>
+              <a:rPr lang="en-US" dirty="0" err="1">
+                <a:solidFill>
+                  <a:schemeClr val="tx2">
+                    <a:lumMod val="75000"/>
+                  </a:schemeClr>
+                </a:solidFill>
+              </a:rPr>
+              <a:t>idnum</a:t>
+            </a:r>
+            <a:r>
+              <a:rPr lang="en-US" dirty="0">
+                <a:solidFill>
+                  <a:schemeClr val="tx2">
+                    <a:lumMod val="75000"/>
+                  </a:schemeClr>
+                </a:solidFill>
+              </a:rPr>
+              <a:t> = input(idchar,8.);</a:t>
+            </a:r>
+          </a:p>
+          <a:p>
+            <a:pPr lvl="1"/>
+            <a:r>
+              <a:rPr lang="en-US" dirty="0"/>
+              <a:t>Alternative trick for converting to numeric: multiply by 1</a:t>
+            </a:r>
+          </a:p>
+          <a:p>
+            <a:pPr marL="457200" lvl="1" indent="0">
+              <a:buNone/>
+            </a:pPr>
+            <a:r>
+              <a:rPr lang="en-US" dirty="0"/>
+              <a:t>	</a:t>
+            </a:r>
+            <a:r>
+              <a:rPr lang="en-US" dirty="0" err="1">
+                <a:solidFill>
+                  <a:schemeClr val="tx2">
+                    <a:lumMod val="75000"/>
+                  </a:schemeClr>
+                </a:solidFill>
+              </a:rPr>
+              <a:t>idnum</a:t>
+            </a:r>
+            <a:r>
+              <a:rPr lang="en-US" dirty="0">
+                <a:solidFill>
+                  <a:schemeClr val="tx2">
+                    <a:lumMod val="75000"/>
+                  </a:schemeClr>
+                </a:solidFill>
+              </a:rPr>
+              <a:t> = </a:t>
+            </a:r>
+            <a:r>
+              <a:rPr lang="en-US" dirty="0" err="1">
+                <a:solidFill>
+                  <a:schemeClr val="tx2">
+                    <a:lumMod val="75000"/>
+                  </a:schemeClr>
+                </a:solidFill>
+              </a:rPr>
+              <a:t>idchar</a:t>
+            </a:r>
+            <a:r>
+              <a:rPr lang="en-US" dirty="0">
+                <a:solidFill>
+                  <a:schemeClr val="tx2">
+                    <a:lumMod val="75000"/>
+                  </a:schemeClr>
+                </a:solidFill>
+              </a:rPr>
+              <a:t> * 1;</a:t>
+            </a:r>
+          </a:p>
+          <a:p>
+            <a:endParaRPr lang="en-US" dirty="0"/>
+          </a:p>
+        </p:txBody>
+      </p:sp>
+    </p:spTree>
+    <p:extLst>
+      <p:ext uri="{BB962C8B-B14F-4D97-AF65-F5344CB8AC3E}">
+        <p14:creationId xmlns:p14="http://schemas.microsoft.com/office/powerpoint/2010/main" val="3659846075"/>
+      </p:ext>
+    </p:extLst>
+  </p:cSld>
+  <p:clrMapOvr>
+    <a:masterClrMapping/>
+  </p:clrMapOvr>
+  <p:timing>
+    <p:tnLst>
+      <p:par>
+        <p:cTn id="1" dur="indefinite" restart="never" nodeType="tmRoot">
+          <p:childTnLst>
+            <p:seq concurrent="1" nextAc="seek">
+              <p:cTn id="2" dur="indefinite" nodeType="mainSeq">
+                <p:childTnLst>
+                  <p:par>
+                    <p:cTn id="3" fill="hold">
+                      <p:stCondLst>
+                        <p:cond delay="indefinite"/>
+                      </p:stCondLst>
+                      <p:childTnLst>
+                        <p:par>
+                          <p:cTn id="4" fill="hold">
+                            <p:stCondLst>
+                              <p:cond delay="0"/>
+                            </p:stCondLst>
+                            <p:childTnLst>
+                              <p:par>
+                                <p:cTn id="5" presetID="22" presetClass="entr" presetSubtype="8" fill="hold" nodeType="clickEffect">
+                                  <p:stCondLst>
+                                    <p:cond delay="0"/>
+                                  </p:stCondLst>
+                                  <p:childTnLst>
+                                    <p:set>
+                                      <p:cBhvr>
+                                        <p:cTn id="6" dur="1" fill="hold">
+                                          <p:stCondLst>
+                                            <p:cond delay="0"/>
+                                          </p:stCondLst>
+                                        </p:cTn>
+                                        <p:tgtEl>
+                                          <p:spTgt spid="3">
+                                            <p:txEl>
+                                              <p:pRg st="3" end="3"/>
+                                            </p:txEl>
+                                          </p:spTgt>
+                                        </p:tgtEl>
+                                        <p:attrNameLst>
+                                          <p:attrName>style.visibility</p:attrName>
+                                        </p:attrNameLst>
+                                      </p:cBhvr>
+                                      <p:to>
+                                        <p:strVal val="visible"/>
+                                      </p:to>
+                                    </p:set>
+                                    <p:animEffect transition="in" filter="wipe(left)">
+                                      <p:cBhvr>
+                                        <p:cTn id="7" dur="500"/>
+                                        <p:tgtEl>
+                                          <p:spTgt spid="3">
+                                            <p:txEl>
+                                              <p:pRg st="3" end="3"/>
+                                            </p:txEl>
+                                          </p:spTgt>
+                                        </p:tgtEl>
+                                      </p:cBhvr>
+                                    </p:animEffect>
+                                  </p:childTnLst>
+                                </p:cTn>
+                              </p:par>
+                              <p:par>
+                                <p:cTn id="8" presetID="22" presetClass="entr" presetSubtype="8" fill="hold" nodeType="withEffect">
+                                  <p:stCondLst>
+                                    <p:cond delay="0"/>
+                                  </p:stCondLst>
+                                  <p:childTnLst>
+                                    <p:set>
+                                      <p:cBhvr>
+                                        <p:cTn id="9" dur="1" fill="hold">
+                                          <p:stCondLst>
+                                            <p:cond delay="0"/>
+                                          </p:stCondLst>
+                                        </p:cTn>
+                                        <p:tgtEl>
+                                          <p:spTgt spid="3">
+                                            <p:txEl>
+                                              <p:pRg st="4" end="4"/>
+                                            </p:txEl>
+                                          </p:spTgt>
+                                        </p:tgtEl>
+                                        <p:attrNameLst>
+                                          <p:attrName>style.visibility</p:attrName>
+                                        </p:attrNameLst>
+                                      </p:cBhvr>
+                                      <p:to>
+                                        <p:strVal val="visible"/>
+                                      </p:to>
+                                    </p:set>
+                                    <p:animEffect transition="in" filter="wipe(left)">
+                                      <p:cBhvr>
+                                        <p:cTn id="10" dur="500"/>
+                                        <p:tgtEl>
+                                          <p:spTgt spid="3">
+                                            <p:txEl>
+                                              <p:pRg st="4" end="4"/>
+                                            </p:txEl>
+                                          </p:spTgt>
+                                        </p:tgtEl>
+                                      </p:cBhvr>
+                                    </p:animEffect>
+                                  </p:childTnLst>
+                                </p:cTn>
+                              </p:par>
+                            </p:childTnLst>
+                          </p:cTn>
+                        </p:par>
+                      </p:childTnLst>
+                    </p:cTn>
+                  </p:par>
+                  <p:par>
+                    <p:cTn id="11" fill="hold">
+                      <p:stCondLst>
+                        <p:cond delay="indefinite"/>
+                      </p:stCondLst>
+                      <p:childTnLst>
+                        <p:par>
+                          <p:cTn id="12" fill="hold">
+                            <p:stCondLst>
+                              <p:cond delay="0"/>
+                            </p:stCondLst>
+                            <p:childTnLst>
+                              <p:par>
+                                <p:cTn id="13" presetID="22" presetClass="entr" presetSubtype="8" fill="hold" nodeType="clickEffect">
+                                  <p:stCondLst>
+                                    <p:cond delay="0"/>
+                                  </p:stCondLst>
+                                  <p:childTnLst>
+                                    <p:set>
+                                      <p:cBhvr>
+                                        <p:cTn id="14" dur="1" fill="hold">
+                                          <p:stCondLst>
+                                            <p:cond delay="0"/>
+                                          </p:stCondLst>
+                                        </p:cTn>
+                                        <p:tgtEl>
+                                          <p:spTgt spid="3">
+                                            <p:txEl>
+                                              <p:pRg st="5" end="5"/>
+                                            </p:txEl>
+                                          </p:spTgt>
+                                        </p:tgtEl>
+                                        <p:attrNameLst>
+                                          <p:attrName>style.visibility</p:attrName>
+                                        </p:attrNameLst>
+                                      </p:cBhvr>
+                                      <p:to>
+                                        <p:strVal val="visible"/>
+                                      </p:to>
+                                    </p:set>
+                                    <p:animEffect transition="in" filter="wipe(left)">
+                                      <p:cBhvr>
+                                        <p:cTn id="15" dur="500"/>
+                                        <p:tgtEl>
+                                          <p:spTgt spid="3">
+                                            <p:txEl>
+                                              <p:pRg st="5" end="5"/>
+                                            </p:txEl>
+                                          </p:spTgt>
+                                        </p:tgtEl>
+                                      </p:cBhvr>
+                                    </p:animEffect>
+                                  </p:childTnLst>
+                                </p:cTn>
+                              </p:par>
+                              <p:par>
+                                <p:cTn id="16" presetID="22" presetClass="entr" presetSubtype="8" fill="hold" nodeType="withEffect">
+                                  <p:stCondLst>
+                                    <p:cond delay="0"/>
+                                  </p:stCondLst>
+                                  <p:childTnLst>
+                                    <p:set>
+                                      <p:cBhvr>
+                                        <p:cTn id="17" dur="1" fill="hold">
+                                          <p:stCondLst>
+                                            <p:cond delay="0"/>
+                                          </p:stCondLst>
+                                        </p:cTn>
+                                        <p:tgtEl>
+                                          <p:spTgt spid="3">
+                                            <p:txEl>
+                                              <p:pRg st="6" end="6"/>
+                                            </p:txEl>
+                                          </p:spTgt>
+                                        </p:tgtEl>
+                                        <p:attrNameLst>
+                                          <p:attrName>style.visibility</p:attrName>
+                                        </p:attrNameLst>
+                                      </p:cBhvr>
+                                      <p:to>
+                                        <p:strVal val="visible"/>
+                                      </p:to>
+                                    </p:set>
+                                    <p:animEffect transition="in" filter="wipe(left)">
+                                      <p:cBhvr>
+                                        <p:cTn id="18" dur="500"/>
+                                        <p:tgtEl>
+                                          <p:spTgt spid="3">
+                                            <p:txEl>
+                                              <p:pRg st="6" end="6"/>
                                             </p:txEl>
                                           </p:spTgt>
                                         </p:tgtEl>
